--- a/Наработки/диздоки/Бельгия/Бельгия.pptx
+++ b/Наработки/диздоки/Бельгия/Бельгия.pptx
@@ -110,7 +110,7 @@
   </p:defaultTextStyle>
   <p:extLst>
     <p:ext uri="{EFAFB233-063F-42B5-8137-9DF3F51BA10A}">
-      <p15:sldGuideLst xmlns:p15="http://schemas.microsoft.com/office/powerpoint/2012/main" xmlns="">
+      <p15:sldGuideLst xmlns:p15="http://schemas.microsoft.com/office/powerpoint/2012/main">
         <p15:guide id="1" orient="horz" pos="11344">
           <p15:clr>
             <a:srgbClr val="A4A3A4"/>
@@ -210,7 +210,7 @@
             <a:fld id="{33E3D7F9-E251-484C-A6FF-FA958879DF69}" type="datetimeFigureOut">
               <a:rPr lang="ru-RU" smtClean="0"/>
               <a:pPr/>
-              <a:t>03.11.2023</a:t>
+              <a:t>16.07.2026</a:t>
             </a:fld>
             <a:endParaRPr lang="ru-RU"/>
           </a:p>
@@ -700,7 +700,7 @@
             <a:fld id="{85A5DE44-605B-4D3B-B2B7-94543DF81A36}" type="datetimeFigureOut">
               <a:rPr lang="ru-RU" smtClean="0"/>
               <a:pPr/>
-              <a:t>03.11.2023</a:t>
+              <a:t>16.07.2026</a:t>
             </a:fld>
             <a:endParaRPr lang="ru-RU"/>
           </a:p>
@@ -872,7 +872,7 @@
             <a:fld id="{85A5DE44-605B-4D3B-B2B7-94543DF81A36}" type="datetimeFigureOut">
               <a:rPr lang="ru-RU" smtClean="0"/>
               <a:pPr/>
-              <a:t>03.11.2023</a:t>
+              <a:t>16.07.2026</a:t>
             </a:fld>
             <a:endParaRPr lang="ru-RU"/>
           </a:p>
@@ -1054,7 +1054,7 @@
             <a:fld id="{85A5DE44-605B-4D3B-B2B7-94543DF81A36}" type="datetimeFigureOut">
               <a:rPr lang="ru-RU" smtClean="0"/>
               <a:pPr/>
-              <a:t>03.11.2023</a:t>
+              <a:t>16.07.2026</a:t>
             </a:fld>
             <a:endParaRPr lang="ru-RU"/>
           </a:p>
@@ -1226,7 +1226,7 @@
             <a:fld id="{85A5DE44-605B-4D3B-B2B7-94543DF81A36}" type="datetimeFigureOut">
               <a:rPr lang="ru-RU" smtClean="0"/>
               <a:pPr/>
-              <a:t>03.11.2023</a:t>
+              <a:t>16.07.2026</a:t>
             </a:fld>
             <a:endParaRPr lang="ru-RU"/>
           </a:p>
@@ -1474,7 +1474,7 @@
             <a:fld id="{85A5DE44-605B-4D3B-B2B7-94543DF81A36}" type="datetimeFigureOut">
               <a:rPr lang="ru-RU" smtClean="0"/>
               <a:pPr/>
-              <a:t>03.11.2023</a:t>
+              <a:t>16.07.2026</a:t>
             </a:fld>
             <a:endParaRPr lang="ru-RU"/>
           </a:p>
@@ -1708,7 +1708,7 @@
             <a:fld id="{85A5DE44-605B-4D3B-B2B7-94543DF81A36}" type="datetimeFigureOut">
               <a:rPr lang="ru-RU" smtClean="0"/>
               <a:pPr/>
-              <a:t>03.11.2023</a:t>
+              <a:t>16.07.2026</a:t>
             </a:fld>
             <a:endParaRPr lang="ru-RU"/>
           </a:p>
@@ -2077,7 +2077,7 @@
             <a:fld id="{85A5DE44-605B-4D3B-B2B7-94543DF81A36}" type="datetimeFigureOut">
               <a:rPr lang="ru-RU" smtClean="0"/>
               <a:pPr/>
-              <a:t>03.11.2023</a:t>
+              <a:t>16.07.2026</a:t>
             </a:fld>
             <a:endParaRPr lang="ru-RU"/>
           </a:p>
@@ -2197,7 +2197,7 @@
             <a:fld id="{85A5DE44-605B-4D3B-B2B7-94543DF81A36}" type="datetimeFigureOut">
               <a:rPr lang="ru-RU" smtClean="0"/>
               <a:pPr/>
-              <a:t>03.11.2023</a:t>
+              <a:t>16.07.2026</a:t>
             </a:fld>
             <a:endParaRPr lang="ru-RU"/>
           </a:p>
@@ -2294,7 +2294,7 @@
             <a:fld id="{85A5DE44-605B-4D3B-B2B7-94543DF81A36}" type="datetimeFigureOut">
               <a:rPr lang="ru-RU" smtClean="0"/>
               <a:pPr/>
-              <a:t>03.11.2023</a:t>
+              <a:t>16.07.2026</a:t>
             </a:fld>
             <a:endParaRPr lang="ru-RU"/>
           </a:p>
@@ -2573,7 +2573,7 @@
             <a:fld id="{85A5DE44-605B-4D3B-B2B7-94543DF81A36}" type="datetimeFigureOut">
               <a:rPr lang="ru-RU" smtClean="0"/>
               <a:pPr/>
-              <a:t>03.11.2023</a:t>
+              <a:t>16.07.2026</a:t>
             </a:fld>
             <a:endParaRPr lang="ru-RU"/>
           </a:p>
@@ -2832,7 +2832,7 @@
             <a:fld id="{85A5DE44-605B-4D3B-B2B7-94543DF81A36}" type="datetimeFigureOut">
               <a:rPr lang="ru-RU" smtClean="0"/>
               <a:pPr/>
-              <a:t>03.11.2023</a:t>
+              <a:t>16.07.2026</a:t>
             </a:fld>
             <a:endParaRPr lang="ru-RU"/>
           </a:p>
@@ -3047,7 +3047,7 @@
             <a:fld id="{85A5DE44-605B-4D3B-B2B7-94543DF81A36}" type="datetimeFigureOut">
               <a:rPr lang="ru-RU" smtClean="0"/>
               <a:pPr/>
-              <a:t>03.11.2023</a:t>
+              <a:t>16.07.2026</a:t>
             </a:fld>
             <a:endParaRPr lang="ru-RU"/>
           </a:p>
@@ -3458,7 +3458,7 @@
           <p:cNvPr id="113" name="Прямоугольник 112">
             <a:extLst>
               <a:ext uri="{FF2B5EF4-FFF2-40B4-BE49-F238E27FC236}">
-                <a16:creationId xmlns:a16="http://schemas.microsoft.com/office/drawing/2014/main" xmlns="" id="{0F2080B8-4947-482B-8722-8B19F72F8559}"/>
+                <a16:creationId xmlns:a16="http://schemas.microsoft.com/office/drawing/2014/main" id="{0F2080B8-4947-482B-8722-8B19F72F8559}"/>
               </a:ext>
             </a:extLst>
           </p:cNvPr>
@@ -3514,7 +3514,7 @@
           <p:cNvPr id="114" name="Прямоугольник 113">
             <a:extLst>
               <a:ext uri="{FF2B5EF4-FFF2-40B4-BE49-F238E27FC236}">
-                <a16:creationId xmlns:a16="http://schemas.microsoft.com/office/drawing/2014/main" xmlns="" id="{C922E429-61A8-41DF-A7BF-ECB4E26FFE98}"/>
+                <a16:creationId xmlns:a16="http://schemas.microsoft.com/office/drawing/2014/main" id="{C922E429-61A8-41DF-A7BF-ECB4E26FFE98}"/>
               </a:ext>
             </a:extLst>
           </p:cNvPr>
@@ -3567,7 +3567,7 @@
           <p:cNvPr id="116" name="Прямоугольник 115">
             <a:extLst>
               <a:ext uri="{FF2B5EF4-FFF2-40B4-BE49-F238E27FC236}">
-                <a16:creationId xmlns:a16="http://schemas.microsoft.com/office/drawing/2014/main" xmlns="" id="{F2311656-ADD2-4DB8-ACE3-3A30EA6BF282}"/>
+                <a16:creationId xmlns:a16="http://schemas.microsoft.com/office/drawing/2014/main" id="{F2311656-ADD2-4DB8-ACE3-3A30EA6BF282}"/>
               </a:ext>
             </a:extLst>
           </p:cNvPr>
@@ -3631,7 +3631,7 @@
           <p:cNvPr id="117" name="Прямоугольник 116">
             <a:extLst>
               <a:ext uri="{FF2B5EF4-FFF2-40B4-BE49-F238E27FC236}">
-                <a16:creationId xmlns:a16="http://schemas.microsoft.com/office/drawing/2014/main" xmlns="" id="{72EE031F-A3D2-40E5-A429-8F3077068C2C}"/>
+                <a16:creationId xmlns:a16="http://schemas.microsoft.com/office/drawing/2014/main" id="{72EE031F-A3D2-40E5-A429-8F3077068C2C}"/>
               </a:ext>
             </a:extLst>
           </p:cNvPr>
@@ -3695,7 +3695,7 @@
           <p:cNvPr id="119" name="Прямоугольник 118">
             <a:extLst>
               <a:ext uri="{FF2B5EF4-FFF2-40B4-BE49-F238E27FC236}">
-                <a16:creationId xmlns:a16="http://schemas.microsoft.com/office/drawing/2014/main" xmlns="" id="{F616D5C5-5E71-491B-B1E1-44B7AFE218A2}"/>
+                <a16:creationId xmlns:a16="http://schemas.microsoft.com/office/drawing/2014/main" id="{F616D5C5-5E71-491B-B1E1-44B7AFE218A2}"/>
               </a:ext>
             </a:extLst>
           </p:cNvPr>
@@ -3746,7 +3746,7 @@
           <p:cNvPr id="120" name="Прямоугольник 119">
             <a:extLst>
               <a:ext uri="{FF2B5EF4-FFF2-40B4-BE49-F238E27FC236}">
-                <a16:creationId xmlns:a16="http://schemas.microsoft.com/office/drawing/2014/main" xmlns="" id="{1289AEDA-B315-477F-8287-09F8B972C3EB}"/>
+                <a16:creationId xmlns:a16="http://schemas.microsoft.com/office/drawing/2014/main" id="{1289AEDA-B315-477F-8287-09F8B972C3EB}"/>
               </a:ext>
             </a:extLst>
           </p:cNvPr>
@@ -3874,7 +3874,7 @@
           <p:cNvPr id="121" name="Прямоугольник 120">
             <a:extLst>
               <a:ext uri="{FF2B5EF4-FFF2-40B4-BE49-F238E27FC236}">
-                <a16:creationId xmlns:a16="http://schemas.microsoft.com/office/drawing/2014/main" xmlns="" id="{36AADC54-76EE-4E99-BA06-5F0E3BC28A8E}"/>
+                <a16:creationId xmlns:a16="http://schemas.microsoft.com/office/drawing/2014/main" id="{36AADC54-76EE-4E99-BA06-5F0E3BC28A8E}"/>
               </a:ext>
             </a:extLst>
           </p:cNvPr>
@@ -3925,7 +3925,7 @@
           <p:cNvPr id="123" name="Прямоугольник 122">
             <a:extLst>
               <a:ext uri="{FF2B5EF4-FFF2-40B4-BE49-F238E27FC236}">
-                <a16:creationId xmlns:a16="http://schemas.microsoft.com/office/drawing/2014/main" xmlns="" id="{6D46541F-895F-4439-9A9A-56C5EEFB5D58}"/>
+                <a16:creationId xmlns:a16="http://schemas.microsoft.com/office/drawing/2014/main" id="{6D46541F-895F-4439-9A9A-56C5EEFB5D58}"/>
               </a:ext>
             </a:extLst>
           </p:cNvPr>
@@ -3976,7 +3976,7 @@
           <p:cNvPr id="124" name="Прямоугольник 123">
             <a:extLst>
               <a:ext uri="{FF2B5EF4-FFF2-40B4-BE49-F238E27FC236}">
-                <a16:creationId xmlns:a16="http://schemas.microsoft.com/office/drawing/2014/main" xmlns="" id="{A4F99D25-6BB2-45F8-8825-8010354D120C}"/>
+                <a16:creationId xmlns:a16="http://schemas.microsoft.com/office/drawing/2014/main" id="{A4F99D25-6BB2-45F8-8825-8010354D120C}"/>
               </a:ext>
             </a:extLst>
           </p:cNvPr>
@@ -4043,7 +4043,7 @@
           <p:cNvPr id="126" name="Прямоугольник 125">
             <a:extLst>
               <a:ext uri="{FF2B5EF4-FFF2-40B4-BE49-F238E27FC236}">
-                <a16:creationId xmlns:a16="http://schemas.microsoft.com/office/drawing/2014/main" xmlns="" id="{BFFDACAE-3D8D-4C1F-B11E-B6E1EE53BEF7}"/>
+                <a16:creationId xmlns:a16="http://schemas.microsoft.com/office/drawing/2014/main" id="{BFFDACAE-3D8D-4C1F-B11E-B6E1EE53BEF7}"/>
               </a:ext>
             </a:extLst>
           </p:cNvPr>
@@ -4110,7 +4110,7 @@
           <p:cNvPr id="127" name="Прямоугольник 126">
             <a:extLst>
               <a:ext uri="{FF2B5EF4-FFF2-40B4-BE49-F238E27FC236}">
-                <a16:creationId xmlns:a16="http://schemas.microsoft.com/office/drawing/2014/main" xmlns="" id="{8638B688-6CBD-4FE7-988B-02AD51073E40}"/>
+                <a16:creationId xmlns:a16="http://schemas.microsoft.com/office/drawing/2014/main" id="{8638B688-6CBD-4FE7-988B-02AD51073E40}"/>
               </a:ext>
             </a:extLst>
           </p:cNvPr>
@@ -4233,7 +4233,7 @@
           <p:cNvPr id="128" name="Прямоугольник 127">
             <a:extLst>
               <a:ext uri="{FF2B5EF4-FFF2-40B4-BE49-F238E27FC236}">
-                <a16:creationId xmlns:a16="http://schemas.microsoft.com/office/drawing/2014/main" xmlns="" id="{AC33A04A-31A1-4C7C-B118-E7E9145786AB}"/>
+                <a16:creationId xmlns:a16="http://schemas.microsoft.com/office/drawing/2014/main" id="{AC33A04A-31A1-4C7C-B118-E7E9145786AB}"/>
               </a:ext>
             </a:extLst>
           </p:cNvPr>
@@ -4313,7 +4313,7 @@
           <p:cNvPr id="131" name="Прямоугольник 130">
             <a:extLst>
               <a:ext uri="{FF2B5EF4-FFF2-40B4-BE49-F238E27FC236}">
-                <a16:creationId xmlns:a16="http://schemas.microsoft.com/office/drawing/2014/main" xmlns="" id="{D6695341-5B54-4DE3-83C4-5FB4D345FC4B}"/>
+                <a16:creationId xmlns:a16="http://schemas.microsoft.com/office/drawing/2014/main" id="{D6695341-5B54-4DE3-83C4-5FB4D345FC4B}"/>
               </a:ext>
             </a:extLst>
           </p:cNvPr>
@@ -4369,7 +4369,7 @@
           <p:cNvPr id="111" name="Прямоугольник 110">
             <a:extLst>
               <a:ext uri="{FF2B5EF4-FFF2-40B4-BE49-F238E27FC236}">
-                <a16:creationId xmlns:a16="http://schemas.microsoft.com/office/drawing/2014/main" xmlns="" id="{2BAA2D08-0381-43BE-BEC0-53C96B2E1978}"/>
+                <a16:creationId xmlns:a16="http://schemas.microsoft.com/office/drawing/2014/main" id="{2BAA2D08-0381-43BE-BEC0-53C96B2E1978}"/>
               </a:ext>
             </a:extLst>
           </p:cNvPr>
@@ -4462,7 +4462,7 @@
           <p:cNvPr id="130" name="Прямоугольник 129">
             <a:extLst>
               <a:ext uri="{FF2B5EF4-FFF2-40B4-BE49-F238E27FC236}">
-                <a16:creationId xmlns:a16="http://schemas.microsoft.com/office/drawing/2014/main" xmlns="" id="{CE65226A-D7B6-4323-ADB7-8698A02C50F6}"/>
+                <a16:creationId xmlns:a16="http://schemas.microsoft.com/office/drawing/2014/main" id="{CE65226A-D7B6-4323-ADB7-8698A02C50F6}"/>
               </a:ext>
             </a:extLst>
           </p:cNvPr>
@@ -4521,7 +4521,7 @@
           <p:cNvPr id="133" name="Прямоугольник 132">
             <a:extLst>
               <a:ext uri="{FF2B5EF4-FFF2-40B4-BE49-F238E27FC236}">
-                <a16:creationId xmlns:a16="http://schemas.microsoft.com/office/drawing/2014/main" xmlns="" id="{0FD1B242-348C-4691-BD1A-EAC1A01409C8}"/>
+                <a16:creationId xmlns:a16="http://schemas.microsoft.com/office/drawing/2014/main" id="{0FD1B242-348C-4691-BD1A-EAC1A01409C8}"/>
               </a:ext>
             </a:extLst>
           </p:cNvPr>
@@ -4590,7 +4590,7 @@
           <p:cNvPr id="134" name="Прямоугольник 133">
             <a:extLst>
               <a:ext uri="{FF2B5EF4-FFF2-40B4-BE49-F238E27FC236}">
-                <a16:creationId xmlns:a16="http://schemas.microsoft.com/office/drawing/2014/main" xmlns="" id="{36AADC54-76EE-4E99-BA06-5F0E3BC28A8E}"/>
+                <a16:creationId xmlns:a16="http://schemas.microsoft.com/office/drawing/2014/main" id="{36AADC54-76EE-4E99-BA06-5F0E3BC28A8E}"/>
               </a:ext>
             </a:extLst>
           </p:cNvPr>
@@ -4630,10 +4630,9 @@
           <a:p>
             <a:pPr algn="ctr"/>
             <a:r>
-              <a:rPr lang="ru-RU" sz="1400" dirty="0" smtClean="0"/>
+              <a:rPr lang="ru-RU" sz="1400" dirty="0"/>
               <a:t>Поддержка перманентной революции</a:t>
             </a:r>
-            <a:endParaRPr lang="ru-RU" sz="1400" dirty="0"/>
           </a:p>
         </p:txBody>
       </p:sp>
@@ -4642,7 +4641,7 @@
           <p:cNvPr id="136" name="Прямоугольник 135">
             <a:extLst>
               <a:ext uri="{FF2B5EF4-FFF2-40B4-BE49-F238E27FC236}">
-                <a16:creationId xmlns:a16="http://schemas.microsoft.com/office/drawing/2014/main" xmlns="" id="{36AADC54-76EE-4E99-BA06-5F0E3BC28A8E}"/>
+                <a16:creationId xmlns:a16="http://schemas.microsoft.com/office/drawing/2014/main" id="{36AADC54-76EE-4E99-BA06-5F0E3BC28A8E}"/>
               </a:ext>
             </a:extLst>
           </p:cNvPr>
@@ -4693,7 +4692,7 @@
           <p:cNvPr id="137" name="Прямоугольник 136">
             <a:extLst>
               <a:ext uri="{FF2B5EF4-FFF2-40B4-BE49-F238E27FC236}">
-                <a16:creationId xmlns:a16="http://schemas.microsoft.com/office/drawing/2014/main" xmlns="" id="{36AADC54-76EE-4E99-BA06-5F0E3BC28A8E}"/>
+                <a16:creationId xmlns:a16="http://schemas.microsoft.com/office/drawing/2014/main" id="{36AADC54-76EE-4E99-BA06-5F0E3BC28A8E}"/>
               </a:ext>
             </a:extLst>
           </p:cNvPr>
@@ -4744,7 +4743,7 @@
           <p:cNvPr id="139" name="Прямоугольник 138">
             <a:extLst>
               <a:ext uri="{FF2B5EF4-FFF2-40B4-BE49-F238E27FC236}">
-                <a16:creationId xmlns:a16="http://schemas.microsoft.com/office/drawing/2014/main" xmlns="" id="{36AADC54-76EE-4E99-BA06-5F0E3BC28A8E}"/>
+                <a16:creationId xmlns:a16="http://schemas.microsoft.com/office/drawing/2014/main" id="{36AADC54-76EE-4E99-BA06-5F0E3BC28A8E}"/>
               </a:ext>
             </a:extLst>
           </p:cNvPr>
@@ -4812,7 +4811,7 @@
           <p:cNvPr id="140" name="Прямоугольник 139">
             <a:extLst>
               <a:ext uri="{FF2B5EF4-FFF2-40B4-BE49-F238E27FC236}">
-                <a16:creationId xmlns:a16="http://schemas.microsoft.com/office/drawing/2014/main" xmlns="" id="{BFFDACAE-3D8D-4C1F-B11E-B6E1EE53BEF7}"/>
+                <a16:creationId xmlns:a16="http://schemas.microsoft.com/office/drawing/2014/main" id="{BFFDACAE-3D8D-4C1F-B11E-B6E1EE53BEF7}"/>
               </a:ext>
             </a:extLst>
           </p:cNvPr>
@@ -4871,30 +4870,29 @@
               <a:t> </a:t>
             </a:r>
             <a:r>
-              <a:rPr lang="en-US" sz="1400" dirty="0" err="1" smtClean="0"/>
+              <a:rPr lang="en-US" sz="1400" dirty="0" err="1"/>
               <a:t>Nationaalsolidaristen</a:t>
             </a:r>
             <a:r>
-              <a:rPr lang="ru-RU" sz="1400" dirty="0" smtClean="0"/>
+              <a:rPr lang="ru-RU" sz="1400" dirty="0"/>
               <a:t> (</a:t>
             </a:r>
             <a:r>
-              <a:rPr lang="ru-RU" sz="1400" dirty="0" err="1" smtClean="0"/>
+              <a:rPr lang="ru-RU" sz="1400" dirty="0" err="1"/>
               <a:t>подъидеология</a:t>
             </a:r>
             <a:r>
-              <a:rPr lang="ru-RU" sz="1400" dirty="0" smtClean="0"/>
+              <a:rPr lang="ru-RU" sz="1400" dirty="0"/>
               <a:t> </a:t>
             </a:r>
             <a:r>
-              <a:rPr lang="ru-RU" sz="1400" dirty="0" err="1" smtClean="0"/>
+              <a:rPr lang="ru-RU" sz="1400" dirty="0" err="1"/>
               <a:t>Солидаризм</a:t>
             </a:r>
             <a:r>
-              <a:rPr lang="ru-RU" sz="1400" dirty="0" smtClean="0"/>
+              <a:rPr lang="ru-RU" sz="1400" dirty="0"/>
               <a:t>)</a:t>
             </a:r>
-            <a:endParaRPr lang="ru-RU" sz="1400" dirty="0"/>
           </a:p>
         </p:txBody>
       </p:sp>
@@ -4903,7 +4901,7 @@
           <p:cNvPr id="142" name="Прямоугольник 141">
             <a:extLst>
               <a:ext uri="{FF2B5EF4-FFF2-40B4-BE49-F238E27FC236}">
-                <a16:creationId xmlns:a16="http://schemas.microsoft.com/office/drawing/2014/main" xmlns="" id="{BFFDACAE-3D8D-4C1F-B11E-B6E1EE53BEF7}"/>
+                <a16:creationId xmlns:a16="http://schemas.microsoft.com/office/drawing/2014/main" id="{BFFDACAE-3D8D-4C1F-B11E-B6E1EE53BEF7}"/>
               </a:ext>
             </a:extLst>
           </p:cNvPr>
@@ -4961,7 +4959,7 @@
           <p:cNvPr id="143" name="Прямоугольник 142">
             <a:extLst>
               <a:ext uri="{FF2B5EF4-FFF2-40B4-BE49-F238E27FC236}">
-                <a16:creationId xmlns:a16="http://schemas.microsoft.com/office/drawing/2014/main" xmlns="" id="{BFFDACAE-3D8D-4C1F-B11E-B6E1EE53BEF7}"/>
+                <a16:creationId xmlns:a16="http://schemas.microsoft.com/office/drawing/2014/main" id="{BFFDACAE-3D8D-4C1F-B11E-B6E1EE53BEF7}"/>
               </a:ext>
             </a:extLst>
           </p:cNvPr>
@@ -5004,12 +5002,8 @@
           <a:p>
             <a:pPr algn="ctr"/>
             <a:r>
-              <a:rPr lang="ru-RU" sz="1400" dirty="0" smtClean="0"/>
-              <a:t>Поощрение </a:t>
-            </a:r>
-            <a:r>
               <a:rPr lang="ru-RU" sz="1400" dirty="0"/>
-              <a:t>общественной жизни </a:t>
+              <a:t>Поощрение общественной жизни </a:t>
             </a:r>
             <a:r>
               <a:rPr lang="ru-RU" sz="600" dirty="0"/>
@@ -5031,7 +5025,7 @@
           <p:cNvPr id="145" name="Прямоугольник 144">
             <a:extLst>
               <a:ext uri="{FF2B5EF4-FFF2-40B4-BE49-F238E27FC236}">
-                <a16:creationId xmlns:a16="http://schemas.microsoft.com/office/drawing/2014/main" xmlns="" id="{BFFDACAE-3D8D-4C1F-B11E-B6E1EE53BEF7}"/>
+                <a16:creationId xmlns:a16="http://schemas.microsoft.com/office/drawing/2014/main" id="{BFFDACAE-3D8D-4C1F-B11E-B6E1EE53BEF7}"/>
               </a:ext>
             </a:extLst>
           </p:cNvPr>
@@ -5074,16 +5068,12 @@
           <a:p>
             <a:pPr algn="ctr"/>
             <a:r>
-              <a:rPr lang="ru-RU" sz="1400" dirty="0" err="1" smtClean="0"/>
+              <a:rPr lang="ru-RU" sz="1400" dirty="0" err="1"/>
               <a:t>Корпоративистская</a:t>
             </a:r>
             <a:r>
-              <a:rPr lang="ru-RU" sz="1400" dirty="0" smtClean="0"/>
-              <a:t> реорганизация </a:t>
-            </a:r>
-            <a:r>
               <a:rPr lang="ru-RU" sz="1400" dirty="0"/>
-              <a:t>государства </a:t>
+              <a:t> реорганизация государства </a:t>
             </a:r>
             <a:r>
               <a:rPr lang="ru-RU" sz="500" dirty="0"/>
@@ -5121,7 +5111,7 @@
           <p:cNvPr id="146" name="Прямоугольник 145">
             <a:extLst>
               <a:ext uri="{FF2B5EF4-FFF2-40B4-BE49-F238E27FC236}">
-                <a16:creationId xmlns:a16="http://schemas.microsoft.com/office/drawing/2014/main" xmlns="" id="{BFFDACAE-3D8D-4C1F-B11E-B6E1EE53BEF7}"/>
+                <a16:creationId xmlns:a16="http://schemas.microsoft.com/office/drawing/2014/main" id="{BFFDACAE-3D8D-4C1F-B11E-B6E1EE53BEF7}"/>
               </a:ext>
             </a:extLst>
           </p:cNvPr>
@@ -5180,20 +5170,16 @@
               <a:t> der </a:t>
             </a:r>
             <a:r>
-              <a:rPr lang="en-US" sz="1400" dirty="0" err="1" smtClean="0"/>
+              <a:rPr lang="en-US" sz="1400" dirty="0" err="1"/>
               <a:t>Nederlanden</a:t>
             </a:r>
             <a:r>
-              <a:rPr lang="ru-RU" sz="1400" dirty="0" smtClean="0"/>
+              <a:rPr lang="ru-RU" sz="1400" dirty="0"/>
               <a:t> </a:t>
             </a:r>
             <a:r>
-              <a:rPr lang="ru-RU" sz="500" dirty="0" smtClean="0"/>
-              <a:t>На </a:t>
-            </a:r>
-            <a:r>
               <a:rPr lang="ru-RU" sz="500" dirty="0"/>
-              <a:t>политическом уровне первоначальной целью было объединение Нидерландов, </a:t>
+              <a:t>На политическом уровне первоначальной целью было объединение Нидерландов, </a:t>
             </a:r>
             <a:r>
               <a:rPr lang="ru-RU" sz="500" dirty="0">
@@ -5255,7 +5241,7 @@
           <p:cNvPr id="148" name="Прямоугольник 147">
             <a:extLst>
               <a:ext uri="{FF2B5EF4-FFF2-40B4-BE49-F238E27FC236}">
-                <a16:creationId xmlns:a16="http://schemas.microsoft.com/office/drawing/2014/main" xmlns="" id="{BFFDACAE-3D8D-4C1F-B11E-B6E1EE53BEF7}"/>
+                <a16:creationId xmlns:a16="http://schemas.microsoft.com/office/drawing/2014/main" id="{BFFDACAE-3D8D-4C1F-B11E-B6E1EE53BEF7}"/>
               </a:ext>
             </a:extLst>
           </p:cNvPr>
@@ -5264,7 +5250,7 @@
         </p:nvSpPr>
         <p:spPr>
           <a:xfrm>
-            <a:off x="21319848" y="6328244"/>
+            <a:off x="23511219" y="7714031"/>
             <a:ext cx="2115918" cy="1080000"/>
           </a:xfrm>
           <a:prstGeom prst="rect">
@@ -5298,12 +5284,8 @@
           <a:p>
             <a:pPr algn="ctr"/>
             <a:r>
-              <a:rPr lang="ru-RU" sz="1400" dirty="0" smtClean="0"/>
-              <a:t>Расширение </a:t>
-            </a:r>
-            <a:r>
               <a:rPr lang="ru-RU" sz="1400" dirty="0"/>
-              <a:t>на запад </a:t>
+              <a:t>Расширение на запад </a:t>
             </a:r>
             <a:r>
               <a:rPr lang="ru-RU" sz="500" dirty="0"/>
@@ -5341,7 +5323,6 @@
               <a:rPr lang="ru-RU" sz="500" dirty="0"/>
               <a:t> и расширившее цель до воссоединения Бельгии , Нидерландов , Люксембурга и Французской Фландрии под авторитарным правительством во главе с королем.)</a:t>
             </a:r>
-            <a:endParaRPr lang="ru-RU" sz="500" dirty="0" smtClean="0"/>
           </a:p>
         </p:txBody>
       </p:sp>
@@ -5350,7 +5331,7 @@
           <p:cNvPr id="149" name="Прямоугольник 148">
             <a:extLst>
               <a:ext uri="{FF2B5EF4-FFF2-40B4-BE49-F238E27FC236}">
-                <a16:creationId xmlns:a16="http://schemas.microsoft.com/office/drawing/2014/main" xmlns="" id="{BFFDACAE-3D8D-4C1F-B11E-B6E1EE53BEF7}"/>
+                <a16:creationId xmlns:a16="http://schemas.microsoft.com/office/drawing/2014/main" id="{BFFDACAE-3D8D-4C1F-B11E-B6E1EE53BEF7}"/>
               </a:ext>
             </a:extLst>
           </p:cNvPr>
@@ -5359,7 +5340,7 @@
         </p:nvSpPr>
         <p:spPr>
           <a:xfrm>
-            <a:off x="24109123" y="6361037"/>
+            <a:off x="20827167" y="7732298"/>
             <a:ext cx="2115918" cy="1080000"/>
           </a:xfrm>
           <a:prstGeom prst="rect">
@@ -5393,7 +5374,7 @@
           <a:p>
             <a:pPr algn="ctr"/>
             <a:r>
-              <a:rPr lang="ru-RU" sz="1400" dirty="0" smtClean="0"/>
+              <a:rPr lang="ru-RU" sz="1400" dirty="0"/>
               <a:t>Расширение на восток</a:t>
             </a:r>
           </a:p>
@@ -5404,7 +5385,7 @@
           <p:cNvPr id="151" name="Прямоугольник 150">
             <a:extLst>
               <a:ext uri="{FF2B5EF4-FFF2-40B4-BE49-F238E27FC236}">
-                <a16:creationId xmlns:a16="http://schemas.microsoft.com/office/drawing/2014/main" xmlns="" id="{BFFDACAE-3D8D-4C1F-B11E-B6E1EE53BEF7}"/>
+                <a16:creationId xmlns:a16="http://schemas.microsoft.com/office/drawing/2014/main" id="{BFFDACAE-3D8D-4C1F-B11E-B6E1EE53BEF7}"/>
               </a:ext>
             </a:extLst>
           </p:cNvPr>
@@ -5502,7 +5483,7 @@
           <p:cNvPr id="152" name="Прямоугольник 151">
             <a:extLst>
               <a:ext uri="{FF2B5EF4-FFF2-40B4-BE49-F238E27FC236}">
-                <a16:creationId xmlns:a16="http://schemas.microsoft.com/office/drawing/2014/main" xmlns="" id="{BFFDACAE-3D8D-4C1F-B11E-B6E1EE53BEF7}"/>
+                <a16:creationId xmlns:a16="http://schemas.microsoft.com/office/drawing/2014/main" id="{BFFDACAE-3D8D-4C1F-B11E-B6E1EE53BEF7}"/>
               </a:ext>
             </a:extLst>
           </p:cNvPr>
@@ -5511,7 +5492,7 @@
         </p:nvSpPr>
         <p:spPr>
           <a:xfrm>
-            <a:off x="22943085" y="7811425"/>
+            <a:off x="24233208" y="10456703"/>
             <a:ext cx="2115918" cy="1080000"/>
           </a:xfrm>
           <a:prstGeom prst="rect">
@@ -5545,18 +5526,13 @@
           <a:p>
             <a:pPr algn="ctr"/>
             <a:r>
-              <a:rPr lang="ru-RU" sz="1400" dirty="0" smtClean="0"/>
-              <a:t>Возродить связи </a:t>
-            </a:r>
-            <a:r>
               <a:rPr lang="ru-RU" sz="1400" dirty="0"/>
-              <a:t>с Африканерами </a:t>
+              <a:t>Возродить связи с Африканерами </a:t>
             </a:r>
             <a:r>
               <a:rPr lang="ru-RU" sz="900" dirty="0"/>
               <a:t>(Также особо упоминалась культурная и историческая связь с африканерами Южной Африки и общинами Нидерландов)</a:t>
             </a:r>
-            <a:endParaRPr lang="ru-RU" sz="900" dirty="0" smtClean="0"/>
           </a:p>
         </p:txBody>
       </p:sp>
@@ -5565,7 +5541,7 @@
           <p:cNvPr id="153" name="Прямоугольник 152">
             <a:extLst>
               <a:ext uri="{FF2B5EF4-FFF2-40B4-BE49-F238E27FC236}">
-                <a16:creationId xmlns:a16="http://schemas.microsoft.com/office/drawing/2014/main" xmlns="" id="{BFFDACAE-3D8D-4C1F-B11E-B6E1EE53BEF7}"/>
+                <a16:creationId xmlns:a16="http://schemas.microsoft.com/office/drawing/2014/main" id="{BFFDACAE-3D8D-4C1F-B11E-B6E1EE53BEF7}"/>
               </a:ext>
             </a:extLst>
           </p:cNvPr>
@@ -5608,7 +5584,7 @@
           <a:p>
             <a:pPr algn="ctr"/>
             <a:r>
-              <a:rPr lang="ru-RU" sz="1400" dirty="0" smtClean="0"/>
+              <a:rPr lang="ru-RU" sz="1400" dirty="0"/>
               <a:t>Поддержка от короля</a:t>
             </a:r>
           </a:p>
@@ -5619,7 +5595,7 @@
           <p:cNvPr id="154" name="Прямоугольник 153">
             <a:extLst>
               <a:ext uri="{FF2B5EF4-FFF2-40B4-BE49-F238E27FC236}">
-                <a16:creationId xmlns:a16="http://schemas.microsoft.com/office/drawing/2014/main" xmlns="" id="{BFFDACAE-3D8D-4C1F-B11E-B6E1EE53BEF7}"/>
+                <a16:creationId xmlns:a16="http://schemas.microsoft.com/office/drawing/2014/main" id="{BFFDACAE-3D8D-4C1F-B11E-B6E1EE53BEF7}"/>
               </a:ext>
             </a:extLst>
           </p:cNvPr>
@@ -5705,7 +5681,7 @@
           <p:cNvPr id="155" name="Прямоугольник 154">
             <a:extLst>
               <a:ext uri="{FF2B5EF4-FFF2-40B4-BE49-F238E27FC236}">
-                <a16:creationId xmlns:a16="http://schemas.microsoft.com/office/drawing/2014/main" xmlns="" id="{BFFDACAE-3D8D-4C1F-B11E-B6E1EE53BEF7}"/>
+                <a16:creationId xmlns:a16="http://schemas.microsoft.com/office/drawing/2014/main" id="{BFFDACAE-3D8D-4C1F-B11E-B6E1EE53BEF7}"/>
               </a:ext>
             </a:extLst>
           </p:cNvPr>
@@ -5772,16 +5748,12 @@
               <a:t> </a:t>
             </a:r>
             <a:r>
-              <a:rPr lang="ru-RU" sz="1400" dirty="0" smtClean="0"/>
+              <a:rPr lang="ru-RU" sz="1400" dirty="0"/>
               <a:t> </a:t>
             </a:r>
             <a:r>
-              <a:rPr lang="ru-RU" sz="700" dirty="0" smtClean="0"/>
-              <a:t>(</a:t>
-            </a:r>
-            <a:r>
               <a:rPr lang="ru-RU" sz="700" dirty="0"/>
-              <a:t>Дочерним объединением был </a:t>
+              <a:t>(Дочерним объединением был </a:t>
             </a:r>
             <a:r>
               <a:rPr lang="ru-RU" sz="700" dirty="0">
@@ -5805,11 +5777,7 @@
             </a:r>
             <a:r>
               <a:rPr lang="ru-RU" sz="700" dirty="0"/>
-              <a:t> видел в них не только частное ополчение, но и питательную среду для того, что он считал «элитой», то есть лучшими из людей</a:t>
-            </a:r>
-            <a:r>
-              <a:rPr lang="ru-RU" sz="700" dirty="0" smtClean="0"/>
-              <a:t>.)</a:t>
+              <a:t> видел в них не только частное ополчение, но и питательную среду для того, что он считал «элитой», то есть лучшими из людей.)</a:t>
             </a:r>
           </a:p>
         </p:txBody>
@@ -5819,7 +5787,7 @@
           <p:cNvPr id="156" name="Прямоугольник 155">
             <a:extLst>
               <a:ext uri="{FF2B5EF4-FFF2-40B4-BE49-F238E27FC236}">
-                <a16:creationId xmlns:a16="http://schemas.microsoft.com/office/drawing/2014/main" xmlns="" id="{BFFDACAE-3D8D-4C1F-B11E-B6E1EE53BEF7}"/>
+                <a16:creationId xmlns:a16="http://schemas.microsoft.com/office/drawing/2014/main" id="{BFFDACAE-3D8D-4C1F-B11E-B6E1EE53BEF7}"/>
               </a:ext>
             </a:extLst>
           </p:cNvPr>
@@ -5862,7 +5830,7 @@
           <a:p>
             <a:pPr algn="ctr"/>
             <a:r>
-              <a:rPr lang="en-US" sz="1400" dirty="0" err="1" smtClean="0"/>
+              <a:rPr lang="en-US" sz="1400" dirty="0" err="1"/>
               <a:t>Verdivro</a:t>
             </a:r>
             <a:r>
@@ -5885,7 +5853,6 @@
               <a:rPr lang="ru-RU" sz="1400" dirty="0"/>
               <a:t>)</a:t>
             </a:r>
-            <a:endParaRPr lang="ru-RU" sz="1400" dirty="0" smtClean="0"/>
           </a:p>
         </p:txBody>
       </p:sp>
@@ -5894,7 +5861,7 @@
           <p:cNvPr id="157" name="Прямоугольник 156">
             <a:extLst>
               <a:ext uri="{FF2B5EF4-FFF2-40B4-BE49-F238E27FC236}">
-                <a16:creationId xmlns:a16="http://schemas.microsoft.com/office/drawing/2014/main" xmlns="" id="{BFFDACAE-3D8D-4C1F-B11E-B6E1EE53BEF7}"/>
+                <a16:creationId xmlns:a16="http://schemas.microsoft.com/office/drawing/2014/main" id="{BFFDACAE-3D8D-4C1F-B11E-B6E1EE53BEF7}"/>
               </a:ext>
             </a:extLst>
           </p:cNvPr>
@@ -5952,7 +5919,6 @@
               <a:rPr lang="ru-RU" sz="1400" dirty="0"/>
               <a:t> , молодежное крыло)</a:t>
             </a:r>
-            <a:endParaRPr lang="ru-RU" sz="1400" dirty="0" smtClean="0"/>
           </a:p>
         </p:txBody>
       </p:sp>
@@ -5961,7 +5927,7 @@
           <p:cNvPr id="158" name="Прямоугольник 157">
             <a:extLst>
               <a:ext uri="{FF2B5EF4-FFF2-40B4-BE49-F238E27FC236}">
-                <a16:creationId xmlns:a16="http://schemas.microsoft.com/office/drawing/2014/main" xmlns="" id="{BFFDACAE-3D8D-4C1F-B11E-B6E1EE53BEF7}"/>
+                <a16:creationId xmlns:a16="http://schemas.microsoft.com/office/drawing/2014/main" id="{BFFDACAE-3D8D-4C1F-B11E-B6E1EE53BEF7}"/>
               </a:ext>
             </a:extLst>
           </p:cNvPr>
@@ -6035,7 +6001,6 @@
               <a:rPr lang="ru-RU" sz="1400" dirty="0"/>
               <a:t> Нидерландов )</a:t>
             </a:r>
-            <a:endParaRPr lang="ru-RU" sz="1400" dirty="0" smtClean="0"/>
           </a:p>
         </p:txBody>
       </p:sp>
@@ -6044,7 +6009,7 @@
           <p:cNvPr id="159" name="Прямоугольник 158">
             <a:extLst>
               <a:ext uri="{FF2B5EF4-FFF2-40B4-BE49-F238E27FC236}">
-                <a16:creationId xmlns:a16="http://schemas.microsoft.com/office/drawing/2014/main" xmlns="" id="{BFFDACAE-3D8D-4C1F-B11E-B6E1EE53BEF7}"/>
+                <a16:creationId xmlns:a16="http://schemas.microsoft.com/office/drawing/2014/main" id="{BFFDACAE-3D8D-4C1F-B11E-B6E1EE53BEF7}"/>
               </a:ext>
             </a:extLst>
           </p:cNvPr>
@@ -6103,7 +6068,7 @@
               <a:t> </a:t>
             </a:r>
             <a:r>
-              <a:rPr lang="en-US" sz="1400" dirty="0" err="1" smtClean="0"/>
+              <a:rPr lang="en-US" sz="1400" dirty="0" err="1"/>
               <a:t>Arbeiderssyndicaten</a:t>
             </a:r>
             <a:r>
@@ -6122,7 +6087,6 @@
               <a:rPr lang="ru-RU" sz="700" dirty="0"/>
               <a:t> до декабря 1933 года — после чего этот профсоюз больше не признавался бельгийским правительством.)</a:t>
             </a:r>
-            <a:endParaRPr lang="ru-RU" sz="700" dirty="0" smtClean="0"/>
           </a:p>
         </p:txBody>
       </p:sp>
@@ -6131,7 +6095,7 @@
           <p:cNvPr id="160" name="Прямоугольник 159">
             <a:extLst>
               <a:ext uri="{FF2B5EF4-FFF2-40B4-BE49-F238E27FC236}">
-                <a16:creationId xmlns:a16="http://schemas.microsoft.com/office/drawing/2014/main" xmlns="" id="{BFFDACAE-3D8D-4C1F-B11E-B6E1EE53BEF7}"/>
+                <a16:creationId xmlns:a16="http://schemas.microsoft.com/office/drawing/2014/main" id="{BFFDACAE-3D8D-4C1F-B11E-B6E1EE53BEF7}"/>
               </a:ext>
             </a:extLst>
           </p:cNvPr>
@@ -6174,7 +6138,7 @@
           <a:p>
             <a:pPr algn="ctr"/>
             <a:r>
-              <a:rPr lang="ru-RU" sz="1400" dirty="0" smtClean="0"/>
+              <a:rPr lang="ru-RU" sz="1400" dirty="0"/>
               <a:t>Распространение правых журналов </a:t>
             </a:r>
             <a:r>
@@ -6345,7 +6309,6 @@
               <a:rPr lang="ru-RU" sz="500" dirty="0"/>
               <a:t> , даже когда тот покинул движение.)</a:t>
             </a:r>
-            <a:endParaRPr lang="ru-RU" sz="500" dirty="0" smtClean="0"/>
           </a:p>
         </p:txBody>
       </p:sp>
@@ -6354,7 +6317,7 @@
           <p:cNvPr id="161" name="Прямоугольник 160">
             <a:extLst>
               <a:ext uri="{FF2B5EF4-FFF2-40B4-BE49-F238E27FC236}">
-                <a16:creationId xmlns:a16="http://schemas.microsoft.com/office/drawing/2014/main" xmlns="" id="{BFFDACAE-3D8D-4C1F-B11E-B6E1EE53BEF7}"/>
+                <a16:creationId xmlns:a16="http://schemas.microsoft.com/office/drawing/2014/main" id="{BFFDACAE-3D8D-4C1F-B11E-B6E1EE53BEF7}"/>
               </a:ext>
             </a:extLst>
           </p:cNvPr>
@@ -6397,7 +6360,7 @@
           <a:p>
             <a:pPr algn="ctr"/>
             <a:r>
-              <a:rPr lang="ru-RU" sz="1400" dirty="0" err="1" smtClean="0"/>
+              <a:rPr lang="ru-RU" sz="1400" dirty="0" err="1"/>
               <a:t>Субсидиарность</a:t>
             </a:r>
             <a:r>
@@ -6440,7 +6403,6 @@
               <a:rPr lang="ru-RU" sz="400" dirty="0"/>
               <a:t> — это организационный метод или правило разделения задач между «высшими» и «нижними» государственными органами . Обычно это означает, что вышестоящие органы не должны делать то, с чем могут справиться нижестоящие органы. Этот принцип является центральным положением католической социальной теории .)</a:t>
             </a:r>
-            <a:endParaRPr lang="ru-RU" sz="400" dirty="0" smtClean="0"/>
           </a:p>
         </p:txBody>
       </p:sp>
@@ -6449,7 +6411,7 @@
           <p:cNvPr id="40" name="Прямоугольник 39">
             <a:extLst>
               <a:ext uri="{FF2B5EF4-FFF2-40B4-BE49-F238E27FC236}">
-                <a16:creationId xmlns:a16="http://schemas.microsoft.com/office/drawing/2014/main" xmlns="" id="{BFFDACAE-3D8D-4C1F-B11E-B6E1EE53BEF7}"/>
+                <a16:creationId xmlns:a16="http://schemas.microsoft.com/office/drawing/2014/main" id="{BFFDACAE-3D8D-4C1F-B11E-B6E1EE53BEF7}"/>
               </a:ext>
             </a:extLst>
           </p:cNvPr>
@@ -6458,7 +6420,7 @@
         </p:nvSpPr>
         <p:spPr>
           <a:xfrm>
-            <a:off x="35092672" y="1838577"/>
+            <a:off x="44909055" y="1819144"/>
             <a:ext cx="2115918" cy="1080000"/>
           </a:xfrm>
           <a:prstGeom prst="rect">
@@ -6498,7 +6460,7 @@
               <a:rPr lang="en-US" sz="1400" dirty="0"/>
               <a:t> Party</a:t>
             </a:r>
-            <a:endParaRPr lang="ru-RU" sz="1400" dirty="0" smtClean="0"/>
+            <a:endParaRPr lang="ru-RU" sz="1400" dirty="0"/>
           </a:p>
         </p:txBody>
       </p:sp>
@@ -6507,7 +6469,7 @@
           <p:cNvPr id="41" name="Прямоугольник 40">
             <a:extLst>
               <a:ext uri="{FF2B5EF4-FFF2-40B4-BE49-F238E27FC236}">
-                <a16:creationId xmlns:a16="http://schemas.microsoft.com/office/drawing/2014/main" xmlns="" id="{BFFDACAE-3D8D-4C1F-B11E-B6E1EE53BEF7}"/>
+                <a16:creationId xmlns:a16="http://schemas.microsoft.com/office/drawing/2014/main" id="{BFFDACAE-3D8D-4C1F-B11E-B6E1EE53BEF7}"/>
               </a:ext>
             </a:extLst>
           </p:cNvPr>
@@ -6550,30 +6512,29 @@
           <a:p>
             <a:pPr algn="ctr"/>
             <a:r>
-              <a:rPr lang="ru-RU" sz="1400" dirty="0" err="1" smtClean="0"/>
+              <a:rPr lang="ru-RU" sz="1400" dirty="0" err="1"/>
               <a:t>Антисемизм</a:t>
             </a:r>
             <a:r>
-              <a:rPr lang="ru-RU" sz="1400" dirty="0" smtClean="0"/>
+              <a:rPr lang="ru-RU" sz="1400" dirty="0"/>
               <a:t> (</a:t>
             </a:r>
             <a:r>
-              <a:rPr lang="ru-RU" sz="1400" dirty="0" err="1" smtClean="0"/>
+              <a:rPr lang="ru-RU" sz="1400" dirty="0" err="1"/>
               <a:t>Северен</a:t>
             </a:r>
             <a:r>
-              <a:rPr lang="ru-RU" sz="1400" dirty="0" smtClean="0"/>
+              <a:rPr lang="ru-RU" sz="1400" dirty="0"/>
               <a:t> считал что </a:t>
             </a:r>
             <a:r>
-              <a:rPr lang="ru-RU" sz="1400" dirty="0" err="1" smtClean="0"/>
+              <a:rPr lang="ru-RU" sz="1400" dirty="0" err="1"/>
               <a:t>гитлер</a:t>
             </a:r>
             <a:r>
-              <a:rPr lang="ru-RU" sz="1400" dirty="0" smtClean="0"/>
+              <a:rPr lang="ru-RU" sz="1400" dirty="0"/>
               <a:t> делает всё медленно в отношении евреев)</a:t>
             </a:r>
-            <a:endParaRPr lang="ru-RU" sz="1400" dirty="0" smtClean="0"/>
           </a:p>
         </p:txBody>
       </p:sp>
@@ -6582,7 +6543,7 @@
           <p:cNvPr id="42" name="Прямоугольник 41">
             <a:extLst>
               <a:ext uri="{FF2B5EF4-FFF2-40B4-BE49-F238E27FC236}">
-                <a16:creationId xmlns:a16="http://schemas.microsoft.com/office/drawing/2014/main" xmlns="" id="{BFFDACAE-3D8D-4C1F-B11E-B6E1EE53BEF7}"/>
+                <a16:creationId xmlns:a16="http://schemas.microsoft.com/office/drawing/2014/main" id="{BFFDACAE-3D8D-4C1F-B11E-B6E1EE53BEF7}"/>
               </a:ext>
             </a:extLst>
           </p:cNvPr>
@@ -6591,7 +6552,7 @@
         </p:nvSpPr>
         <p:spPr>
           <a:xfrm>
-            <a:off x="32204160" y="3265914"/>
+            <a:off x="42020543" y="3246481"/>
             <a:ext cx="2115918" cy="1080000"/>
           </a:xfrm>
           <a:prstGeom prst="rect">
@@ -6635,10 +6596,9 @@
           <a:p>
             <a:pPr algn="ctr"/>
             <a:r>
-              <a:rPr lang="ru-RU" sz="1400" dirty="0" smtClean="0"/>
+              <a:rPr lang="ru-RU" sz="1400" dirty="0"/>
               <a:t>Отмена либеральной демократии</a:t>
             </a:r>
-            <a:endParaRPr lang="ru-RU" sz="1400" dirty="0" smtClean="0"/>
           </a:p>
         </p:txBody>
       </p:sp>
@@ -6647,7 +6607,7 @@
           <p:cNvPr id="43" name="Прямоугольник 42">
             <a:extLst>
               <a:ext uri="{FF2B5EF4-FFF2-40B4-BE49-F238E27FC236}">
-                <a16:creationId xmlns:a16="http://schemas.microsoft.com/office/drawing/2014/main" xmlns="" id="{BFFDACAE-3D8D-4C1F-B11E-B6E1EE53BEF7}"/>
+                <a16:creationId xmlns:a16="http://schemas.microsoft.com/office/drawing/2014/main" id="{BFFDACAE-3D8D-4C1F-B11E-B6E1EE53BEF7}"/>
               </a:ext>
             </a:extLst>
           </p:cNvPr>
@@ -6656,7 +6616,7 @@
         </p:nvSpPr>
         <p:spPr>
           <a:xfrm>
-            <a:off x="35092672" y="3285347"/>
+            <a:off x="44909055" y="3265914"/>
             <a:ext cx="2115918" cy="1080000"/>
           </a:xfrm>
           <a:prstGeom prst="rect">
@@ -6689,10 +6649,843 @@
           <a:p>
             <a:pPr algn="ctr"/>
             <a:r>
-              <a:rPr lang="ru-RU" sz="1400" dirty="0" smtClean="0"/>
+              <a:rPr lang="ru-RU" sz="1400" dirty="0"/>
               <a:t>Идеализация сельской жизни и традиционных семейных ценностей</a:t>
             </a:r>
-            <a:endParaRPr lang="ru-RU" sz="1400" dirty="0" smtClean="0"/>
+          </a:p>
+        </p:txBody>
+      </p:sp>
+      <p:sp>
+        <p:nvSpPr>
+          <p:cNvPr id="44" name="Прямоугольник 43">
+            <a:extLst>
+              <a:ext uri="{FF2B5EF4-FFF2-40B4-BE49-F238E27FC236}">
+                <a16:creationId xmlns:a16="http://schemas.microsoft.com/office/drawing/2014/main" id="{D0A819FF-EB37-4969-A1EA-CDF52D6C85D9}"/>
+              </a:ext>
+            </a:extLst>
+          </p:cNvPr>
+          <p:cNvSpPr/>
+          <p:nvPr/>
+        </p:nvSpPr>
+        <p:spPr>
+          <a:xfrm>
+            <a:off x="22177041" y="6328244"/>
+            <a:ext cx="2115918" cy="1080000"/>
+          </a:xfrm>
+          <a:prstGeom prst="rect">
+            <a:avLst/>
+          </a:prstGeom>
+          <a:solidFill>
+            <a:schemeClr val="accent2">
+              <a:lumMod val="60000"/>
+              <a:lumOff val="40000"/>
+            </a:schemeClr>
+          </a:solidFill>
+          <a:ln w="28575"/>
+        </p:spPr>
+        <p:style>
+          <a:lnRef idx="2">
+            <a:schemeClr val="accent1"/>
+          </a:lnRef>
+          <a:fillRef idx="1">
+            <a:schemeClr val="lt1"/>
+          </a:fillRef>
+          <a:effectRef idx="0">
+            <a:schemeClr val="accent1"/>
+          </a:effectRef>
+          <a:fontRef idx="minor">
+            <a:schemeClr val="dk1"/>
+          </a:fontRef>
+        </p:style>
+        <p:txBody>
+          <a:bodyPr lIns="124733" tIns="62367" rIns="124733" bIns="62367" rtlCol="0" anchor="ctr"/>
+          <a:lstStyle/>
+          <a:p>
+            <a:pPr algn="ctr"/>
+            <a:r>
+              <a:rPr lang="ru-RU" sz="1400" dirty="0" err="1"/>
+              <a:t>Федерализация</a:t>
+            </a:r>
+            <a:r>
+              <a:rPr lang="ru-RU" sz="500" dirty="0" err="1"/>
+              <a:t>В</a:t>
+            </a:r>
+            <a:r>
+              <a:rPr lang="ru-RU" sz="500" dirty="0"/>
+              <a:t> 1934 году Ван </a:t>
+            </a:r>
+            <a:r>
+              <a:rPr lang="ru-RU" sz="500" dirty="0" err="1"/>
+              <a:t>Северен</a:t>
+            </a:r>
+            <a:r>
+              <a:rPr lang="ru-RU" sz="500" dirty="0"/>
+              <a:t> сменил маршрут своего движения </a:t>
+            </a:r>
+            <a:r>
+              <a:rPr lang="ru-RU" sz="500" dirty="0" err="1"/>
+              <a:t>нановый</a:t>
+            </a:r>
+            <a:r>
+              <a:rPr lang="ru-RU" sz="500" dirty="0"/>
+              <a:t>, решительно развернувшись против любых форм </a:t>
+            </a:r>
+            <a:r>
+              <a:rPr lang="ru-RU" sz="500" dirty="0" err="1"/>
+              <a:t>фламандского</a:t>
+            </a:r>
+            <a:r>
+              <a:rPr lang="ru-RU" sz="500" dirty="0"/>
+              <a:t> изоляционизма и даже в сторону федерализма. </a:t>
+            </a:r>
+            <a:r>
+              <a:rPr lang="ru-RU" sz="500" dirty="0" err="1"/>
+              <a:t>Егоцелью</a:t>
+            </a:r>
+            <a:r>
+              <a:rPr lang="ru-RU" sz="500" dirty="0"/>
+              <a:t> теперь стало вместе с </a:t>
+            </a:r>
+            <a:r>
+              <a:rPr lang="ru-RU" sz="500" dirty="0" err="1"/>
+              <a:t>Валлонией</a:t>
+            </a:r>
+            <a:r>
+              <a:rPr lang="ru-RU" sz="500" dirty="0"/>
+              <a:t>, Люксембургом и </a:t>
+            </a:r>
+            <a:r>
+              <a:rPr lang="ru-RU" sz="500" dirty="0" err="1"/>
+              <a:t>Нидерландами</a:t>
+            </a:r>
+            <a:r>
+              <a:rPr lang="ru-RU" sz="500" dirty="0"/>
+              <a:t> добиваться возрождения государства Семнадцати провинций.</a:t>
+            </a:r>
+          </a:p>
+        </p:txBody>
+      </p:sp>
+      <p:sp>
+        <p:nvSpPr>
+          <p:cNvPr id="45" name="Прямоугольник 44">
+            <a:extLst>
+              <a:ext uri="{FF2B5EF4-FFF2-40B4-BE49-F238E27FC236}">
+                <a16:creationId xmlns:a16="http://schemas.microsoft.com/office/drawing/2014/main" id="{1DF863CF-81E9-438C-8496-CDFEAD348099}"/>
+              </a:ext>
+            </a:extLst>
+          </p:cNvPr>
+          <p:cNvSpPr/>
+          <p:nvPr/>
+        </p:nvSpPr>
+        <p:spPr>
+          <a:xfrm>
+            <a:off x="22213616" y="9233401"/>
+            <a:ext cx="2115918" cy="1080000"/>
+          </a:xfrm>
+          <a:prstGeom prst="rect">
+            <a:avLst/>
+          </a:prstGeom>
+          <a:solidFill>
+            <a:schemeClr val="accent2">
+              <a:lumMod val="60000"/>
+              <a:lumOff val="40000"/>
+            </a:schemeClr>
+          </a:solidFill>
+          <a:ln w="28575"/>
+        </p:spPr>
+        <p:style>
+          <a:lnRef idx="2">
+            <a:schemeClr val="accent1"/>
+          </a:lnRef>
+          <a:fillRef idx="1">
+            <a:schemeClr val="lt1"/>
+          </a:fillRef>
+          <a:effectRef idx="0">
+            <a:schemeClr val="accent1"/>
+          </a:effectRef>
+          <a:fontRef idx="minor">
+            <a:schemeClr val="dk1"/>
+          </a:fontRef>
+        </p:style>
+        <p:txBody>
+          <a:bodyPr lIns="124733" tIns="62367" rIns="124733" bIns="62367" rtlCol="0" anchor="ctr"/>
+          <a:lstStyle/>
+          <a:p>
+            <a:pPr algn="ctr"/>
+            <a:r>
+              <a:rPr lang="ru-RU" sz="1400" dirty="0"/>
+              <a:t>Государство Семнадцати провинций</a:t>
+            </a:r>
+          </a:p>
+        </p:txBody>
+      </p:sp>
+      <p:sp>
+        <p:nvSpPr>
+          <p:cNvPr id="46" name="Прямоугольник 45">
+            <a:extLst>
+              <a:ext uri="{FF2B5EF4-FFF2-40B4-BE49-F238E27FC236}">
+                <a16:creationId xmlns:a16="http://schemas.microsoft.com/office/drawing/2014/main" id="{AB8F42EE-05F0-41A0-8521-2A6B8026711C}"/>
+              </a:ext>
+            </a:extLst>
+          </p:cNvPr>
+          <p:cNvSpPr/>
+          <p:nvPr/>
+        </p:nvSpPr>
+        <p:spPr>
+          <a:xfrm>
+            <a:off x="36711580" y="1838577"/>
+            <a:ext cx="2115918" cy="1080000"/>
+          </a:xfrm>
+          <a:prstGeom prst="rect">
+            <a:avLst/>
+          </a:prstGeom>
+          <a:solidFill>
+            <a:schemeClr val="accent3">
+              <a:lumMod val="60000"/>
+              <a:lumOff val="40000"/>
+            </a:schemeClr>
+          </a:solidFill>
+          <a:ln w="28575"/>
+        </p:spPr>
+        <p:style>
+          <a:lnRef idx="2">
+            <a:schemeClr val="accent1"/>
+          </a:lnRef>
+          <a:fillRef idx="1">
+            <a:schemeClr val="lt1"/>
+          </a:fillRef>
+          <a:effectRef idx="0">
+            <a:schemeClr val="accent1"/>
+          </a:effectRef>
+          <a:fontRef idx="minor">
+            <a:schemeClr val="dk1"/>
+          </a:fontRef>
+        </p:style>
+        <p:txBody>
+          <a:bodyPr lIns="124733" tIns="62367" rIns="124733" bIns="62367" rtlCol="0" anchor="ctr"/>
+          <a:lstStyle/>
+          <a:p>
+            <a:pPr algn="ctr"/>
+            <a:r>
+              <a:rPr lang="en-US" sz="1400" dirty="0" err="1"/>
+              <a:t>Vlaamsch</a:t>
+            </a:r>
+            <a:r>
+              <a:rPr lang="en-US" sz="1400" dirty="0"/>
+              <a:t> </a:t>
+            </a:r>
+            <a:r>
+              <a:rPr lang="en-US" sz="1400" dirty="0" err="1"/>
+              <a:t>Nationaal</a:t>
+            </a:r>
+            <a:r>
+              <a:rPr lang="en-US" sz="1400" dirty="0"/>
+              <a:t> </a:t>
+            </a:r>
+            <a:r>
+              <a:rPr lang="en-US" sz="1400" dirty="0" err="1"/>
+              <a:t>Verbond</a:t>
+            </a:r>
+            <a:r>
+              <a:rPr lang="ru-RU" sz="1400" dirty="0"/>
+              <a:t> (</a:t>
+            </a:r>
+            <a:r>
+              <a:rPr lang="ru-RU" sz="1400" dirty="0" err="1"/>
+              <a:t>подъидеология</a:t>
+            </a:r>
+            <a:r>
+              <a:rPr lang="ru-RU" sz="1400" dirty="0"/>
+              <a:t> национализм)</a:t>
+            </a:r>
+          </a:p>
+        </p:txBody>
+      </p:sp>
+      <p:sp>
+        <p:nvSpPr>
+          <p:cNvPr id="47" name="Прямоугольник 46">
+            <a:extLst>
+              <a:ext uri="{FF2B5EF4-FFF2-40B4-BE49-F238E27FC236}">
+                <a16:creationId xmlns:a16="http://schemas.microsoft.com/office/drawing/2014/main" id="{43E608BD-700D-4923-B2F4-40D0FC81CBE0}"/>
+              </a:ext>
+            </a:extLst>
+          </p:cNvPr>
+          <p:cNvSpPr/>
+          <p:nvPr/>
+        </p:nvSpPr>
+        <p:spPr>
+          <a:xfrm>
+            <a:off x="32644906" y="3265914"/>
+            <a:ext cx="2115918" cy="1080000"/>
+          </a:xfrm>
+          <a:prstGeom prst="rect">
+            <a:avLst/>
+          </a:prstGeom>
+          <a:solidFill>
+            <a:schemeClr val="accent3">
+              <a:lumMod val="60000"/>
+              <a:lumOff val="40000"/>
+            </a:schemeClr>
+          </a:solidFill>
+          <a:ln w="28575"/>
+        </p:spPr>
+        <p:style>
+          <a:lnRef idx="2">
+            <a:schemeClr val="accent1"/>
+          </a:lnRef>
+          <a:fillRef idx="1">
+            <a:schemeClr val="lt1"/>
+          </a:fillRef>
+          <a:effectRef idx="0">
+            <a:schemeClr val="accent1"/>
+          </a:effectRef>
+          <a:fontRef idx="minor">
+            <a:schemeClr val="dk1"/>
+          </a:fontRef>
+        </p:style>
+        <p:txBody>
+          <a:bodyPr lIns="124733" tIns="62367" rIns="124733" bIns="62367" rtlCol="0" anchor="ctr"/>
+          <a:lstStyle/>
+          <a:p>
+            <a:pPr algn="ctr"/>
+            <a:r>
+              <a:rPr lang="ru-RU" sz="1400" dirty="0"/>
+              <a:t>Стремление к Великим Нидерландам </a:t>
+            </a:r>
+            <a:r>
+              <a:rPr lang="ru-RU" sz="1000" dirty="0"/>
+              <a:t>(делавший особый акцент на воссоединении с Нидерландами в рамках Великого нидерландского государства.)</a:t>
+            </a:r>
+            <a:endParaRPr lang="ru-RU" sz="1400" dirty="0"/>
+          </a:p>
+        </p:txBody>
+      </p:sp>
+      <p:sp>
+        <p:nvSpPr>
+          <p:cNvPr id="48" name="Прямоугольник 47">
+            <a:extLst>
+              <a:ext uri="{FF2B5EF4-FFF2-40B4-BE49-F238E27FC236}">
+                <a16:creationId xmlns:a16="http://schemas.microsoft.com/office/drawing/2014/main" id="{88E1894E-D256-4F7D-ADF6-9B2AA4643C4D}"/>
+              </a:ext>
+            </a:extLst>
+          </p:cNvPr>
+          <p:cNvSpPr/>
+          <p:nvPr/>
+        </p:nvSpPr>
+        <p:spPr>
+          <a:xfrm>
+            <a:off x="32644906" y="4827286"/>
+            <a:ext cx="2115918" cy="1080000"/>
+          </a:xfrm>
+          <a:prstGeom prst="rect">
+            <a:avLst/>
+          </a:prstGeom>
+          <a:solidFill>
+            <a:schemeClr val="accent3">
+              <a:lumMod val="60000"/>
+              <a:lumOff val="40000"/>
+            </a:schemeClr>
+          </a:solidFill>
+          <a:ln w="28575"/>
+        </p:spPr>
+        <p:style>
+          <a:lnRef idx="2">
+            <a:schemeClr val="accent1"/>
+          </a:lnRef>
+          <a:fillRef idx="1">
+            <a:schemeClr val="lt1"/>
+          </a:fillRef>
+          <a:effectRef idx="0">
+            <a:schemeClr val="accent1"/>
+          </a:effectRef>
+          <a:fontRef idx="minor">
+            <a:schemeClr val="dk1"/>
+          </a:fontRef>
+        </p:style>
+        <p:txBody>
+          <a:bodyPr lIns="124733" tIns="62367" rIns="124733" bIns="62367" rtlCol="0" anchor="ctr"/>
+          <a:lstStyle/>
+          <a:p>
+            <a:pPr algn="ctr"/>
+            <a:r>
+              <a:rPr lang="ru-RU" sz="1400" dirty="0"/>
+              <a:t>Объединиться с Нидерландами</a:t>
+            </a:r>
+          </a:p>
+        </p:txBody>
+      </p:sp>
+      <p:sp>
+        <p:nvSpPr>
+          <p:cNvPr id="50" name="Прямоугольник 49">
+            <a:extLst>
+              <a:ext uri="{FF2B5EF4-FFF2-40B4-BE49-F238E27FC236}">
+                <a16:creationId xmlns:a16="http://schemas.microsoft.com/office/drawing/2014/main" id="{8B0DA630-5B48-4E85-AC04-294DEC0EA441}"/>
+              </a:ext>
+            </a:extLst>
+          </p:cNvPr>
+          <p:cNvSpPr/>
+          <p:nvPr/>
+        </p:nvSpPr>
+        <p:spPr>
+          <a:xfrm>
+            <a:off x="35263780" y="3265914"/>
+            <a:ext cx="2115918" cy="1080000"/>
+          </a:xfrm>
+          <a:prstGeom prst="rect">
+            <a:avLst/>
+          </a:prstGeom>
+          <a:solidFill>
+            <a:schemeClr val="accent3">
+              <a:lumMod val="60000"/>
+              <a:lumOff val="40000"/>
+            </a:schemeClr>
+          </a:solidFill>
+          <a:ln w="28575"/>
+        </p:spPr>
+        <p:style>
+          <a:lnRef idx="2">
+            <a:schemeClr val="accent1"/>
+          </a:lnRef>
+          <a:fillRef idx="1">
+            <a:schemeClr val="lt1"/>
+          </a:fillRef>
+          <a:effectRef idx="0">
+            <a:schemeClr val="accent1"/>
+          </a:effectRef>
+          <a:fontRef idx="minor">
+            <a:schemeClr val="dk1"/>
+          </a:fontRef>
+        </p:style>
+        <p:txBody>
+          <a:bodyPr lIns="124733" tIns="62367" rIns="124733" bIns="62367" rtlCol="0" anchor="ctr"/>
+          <a:lstStyle/>
+          <a:p>
+            <a:pPr algn="ctr"/>
+            <a:r>
+              <a:rPr lang="ru-RU" sz="1400" dirty="0"/>
+              <a:t>Утвердить Совет руководителей во главе страны</a:t>
+            </a:r>
+          </a:p>
+          <a:p>
+            <a:pPr algn="ctr"/>
+            <a:r>
+              <a:rPr lang="ru-RU" sz="400" dirty="0"/>
+              <a:t>(</a:t>
+            </a:r>
+            <a:r>
+              <a:rPr lang="ru-RU" sz="400" dirty="0" err="1"/>
+              <a:t>Штафу</a:t>
+            </a:r>
+            <a:r>
+              <a:rPr lang="ru-RU" sz="400" dirty="0"/>
+              <a:t> </a:t>
+            </a:r>
+            <a:r>
+              <a:rPr lang="ru-RU" sz="400" dirty="0" err="1"/>
+              <a:t>Деклерку</a:t>
+            </a:r>
+            <a:r>
+              <a:rPr lang="ru-RU" sz="400" dirty="0"/>
+              <a:t> помогал Совет руководителей , в состав которого входили </a:t>
+            </a:r>
+            <a:r>
+              <a:rPr lang="ru-RU" sz="400" dirty="0" err="1"/>
+              <a:t>Хендрик</a:t>
+            </a:r>
+            <a:r>
+              <a:rPr lang="ru-RU" sz="400" dirty="0"/>
+              <a:t> Элиас , </a:t>
+            </a:r>
+            <a:r>
+              <a:rPr lang="ru-RU" sz="400" dirty="0" err="1"/>
+              <a:t>Реймонд</a:t>
+            </a:r>
+            <a:r>
+              <a:rPr lang="ru-RU" sz="400" dirty="0"/>
+              <a:t> </a:t>
+            </a:r>
+            <a:r>
+              <a:rPr lang="ru-RU" sz="400" dirty="0" err="1"/>
+              <a:t>Толленаре</a:t>
+            </a:r>
+            <a:r>
+              <a:rPr lang="ru-RU" sz="400" dirty="0"/>
+              <a:t> , Жерар </a:t>
+            </a:r>
+            <a:r>
+              <a:rPr lang="ru-RU" sz="400" dirty="0" err="1"/>
+              <a:t>Ромсе</a:t>
+            </a:r>
+            <a:r>
+              <a:rPr lang="ru-RU" sz="400" dirty="0"/>
+              <a:t> и Эрнест Ван </a:t>
+            </a:r>
+            <a:r>
+              <a:rPr lang="ru-RU" sz="400" dirty="0" err="1"/>
+              <a:t>ден</a:t>
+            </a:r>
+            <a:r>
+              <a:rPr lang="ru-RU" sz="400" dirty="0"/>
+              <a:t> Берге . Он называл себя Лидером . 23 октября 1940 года этот Совет руководителей был расширен и включил в себя Франса </a:t>
+            </a:r>
+            <a:r>
+              <a:rPr lang="ru-RU" sz="400" dirty="0" err="1"/>
+              <a:t>Даэльса</a:t>
+            </a:r>
+            <a:r>
+              <a:rPr lang="ru-RU" sz="400" dirty="0"/>
+              <a:t> , Эдгара </a:t>
+            </a:r>
+            <a:r>
+              <a:rPr lang="ru-RU" sz="400" dirty="0" err="1"/>
+              <a:t>Дельво</a:t>
+            </a:r>
+            <a:r>
+              <a:rPr lang="ru-RU" sz="400" dirty="0"/>
+              <a:t> , Джерома </a:t>
+            </a:r>
+            <a:r>
+              <a:rPr lang="ru-RU" sz="400" dirty="0" err="1"/>
+              <a:t>Леуридана</a:t>
+            </a:r>
+            <a:r>
+              <a:rPr lang="ru-RU" sz="400" dirty="0"/>
+              <a:t> и Раймонда </a:t>
+            </a:r>
+            <a:r>
+              <a:rPr lang="ru-RU" sz="400" dirty="0" err="1"/>
+              <a:t>Спелеерса</a:t>
+            </a:r>
+            <a:r>
+              <a:rPr lang="ru-RU" sz="400" dirty="0"/>
+              <a:t> . Вскоре после этого к нему присоединился и Ян </a:t>
+            </a:r>
+            <a:r>
+              <a:rPr lang="ru-RU" sz="400" dirty="0" err="1"/>
+              <a:t>Тиммерманс</a:t>
+            </a:r>
+            <a:r>
+              <a:rPr lang="ru-RU" sz="400" dirty="0"/>
+              <a:t> .)</a:t>
+            </a:r>
+            <a:endParaRPr lang="ru-RU" sz="1400" dirty="0"/>
+          </a:p>
+        </p:txBody>
+      </p:sp>
+      <p:sp>
+        <p:nvSpPr>
+          <p:cNvPr id="51" name="Прямоугольник 50">
+            <a:extLst>
+              <a:ext uri="{FF2B5EF4-FFF2-40B4-BE49-F238E27FC236}">
+                <a16:creationId xmlns:a16="http://schemas.microsoft.com/office/drawing/2014/main" id="{29B35C61-0D95-4D20-82EE-8936DBA836BF}"/>
+              </a:ext>
+            </a:extLst>
+          </p:cNvPr>
+          <p:cNvSpPr/>
+          <p:nvPr/>
+        </p:nvSpPr>
+        <p:spPr>
+          <a:xfrm>
+            <a:off x="33964835" y="1838577"/>
+            <a:ext cx="2115918" cy="1080000"/>
+          </a:xfrm>
+          <a:prstGeom prst="rect">
+            <a:avLst/>
+          </a:prstGeom>
+          <a:solidFill>
+            <a:schemeClr val="accent3">
+              <a:lumMod val="60000"/>
+              <a:lumOff val="40000"/>
+            </a:schemeClr>
+          </a:solidFill>
+          <a:ln w="28575"/>
+        </p:spPr>
+        <p:style>
+          <a:lnRef idx="2">
+            <a:schemeClr val="accent1"/>
+          </a:lnRef>
+          <a:fillRef idx="1">
+            <a:schemeClr val="lt1"/>
+          </a:fillRef>
+          <a:effectRef idx="0">
+            <a:schemeClr val="accent1"/>
+          </a:effectRef>
+          <a:fontRef idx="minor">
+            <a:schemeClr val="dk1"/>
+          </a:fontRef>
+        </p:style>
+        <p:txBody>
+          <a:bodyPr lIns="124733" tIns="62367" rIns="124733" bIns="62367" rtlCol="0" anchor="ctr"/>
+          <a:lstStyle/>
+          <a:p>
+            <a:pPr algn="ctr"/>
+            <a:r>
+              <a:rPr lang="ru-RU" sz="500" dirty="0"/>
+              <a:t>(Некоторые группы, такие как умеренная Лимбургская католическая фламандская народная партия , не присоединились к ней. В 1937 году, отчасти благодаря вмешательству известного оранжиста и сторонника «Великих Нидерландов» Питера Гейла и Карела </a:t>
+            </a:r>
+            <a:r>
+              <a:rPr lang="ru-RU" sz="500" dirty="0" err="1"/>
+              <a:t>Герретсона</a:t>
+            </a:r>
+            <a:r>
+              <a:rPr lang="ru-RU" sz="500" dirty="0"/>
+              <a:t> , которые не смогли разгадать интриги внутри фламандского движения того времени, VNV удалось включить в свой состав </a:t>
+            </a:r>
+            <a:r>
+              <a:rPr lang="ru-RU" sz="500" dirty="0" err="1"/>
+              <a:t>Frontpartij</a:t>
+            </a:r>
+            <a:r>
+              <a:rPr lang="ru-RU" sz="500" dirty="0"/>
+              <a:t> (</a:t>
+            </a:r>
+            <a:r>
+              <a:rPr lang="ru-RU" sz="500" dirty="0" err="1"/>
+              <a:t>Фронтпартию</a:t>
+            </a:r>
+            <a:r>
+              <a:rPr lang="ru-RU" sz="500" dirty="0"/>
+              <a:t>), социально-фламандскую партию. Герман </a:t>
+            </a:r>
+            <a:r>
+              <a:rPr lang="ru-RU" sz="500" dirty="0" err="1"/>
+              <a:t>Вос</a:t>
+            </a:r>
+            <a:r>
+              <a:rPr lang="ru-RU" sz="500" dirty="0"/>
+              <a:t> , лидер </a:t>
+            </a:r>
+            <a:r>
+              <a:rPr lang="ru-RU" sz="500" dirty="0" err="1"/>
+              <a:t>Фронтпартии</a:t>
+            </a:r>
+            <a:r>
+              <a:rPr lang="ru-RU" sz="500" dirty="0"/>
+              <a:t>, впоследствии перешёл на сторону БВП (Бюро по политическим реформам). Также с апреля 1937 года ВНВ начала получать ежемесячное пособие от немецкого Министерства пропаганды в размере около 5000 евро.)</a:t>
+            </a:r>
+          </a:p>
+        </p:txBody>
+      </p:sp>
+      <p:sp>
+        <p:nvSpPr>
+          <p:cNvPr id="52" name="Прямоугольник 51">
+            <a:extLst>
+              <a:ext uri="{FF2B5EF4-FFF2-40B4-BE49-F238E27FC236}">
+                <a16:creationId xmlns:a16="http://schemas.microsoft.com/office/drawing/2014/main" id="{25DAD8FF-4BA6-4E68-B2B1-571BD1B9D729}"/>
+              </a:ext>
+            </a:extLst>
+          </p:cNvPr>
+          <p:cNvSpPr/>
+          <p:nvPr/>
+        </p:nvSpPr>
+        <p:spPr>
+          <a:xfrm>
+            <a:off x="32644906" y="6328244"/>
+            <a:ext cx="2115918" cy="1080000"/>
+          </a:xfrm>
+          <a:prstGeom prst="rect">
+            <a:avLst/>
+          </a:prstGeom>
+          <a:solidFill>
+            <a:schemeClr val="accent3">
+              <a:lumMod val="60000"/>
+              <a:lumOff val="40000"/>
+            </a:schemeClr>
+          </a:solidFill>
+          <a:ln w="28575"/>
+        </p:spPr>
+        <p:style>
+          <a:lnRef idx="2">
+            <a:schemeClr val="accent1"/>
+          </a:lnRef>
+          <a:fillRef idx="1">
+            <a:schemeClr val="lt1"/>
+          </a:fillRef>
+          <a:effectRef idx="0">
+            <a:schemeClr val="accent1"/>
+          </a:effectRef>
+          <a:fontRef idx="minor">
+            <a:schemeClr val="dk1"/>
+          </a:fontRef>
+        </p:style>
+        <p:txBody>
+          <a:bodyPr lIns="124733" tIns="62367" rIns="124733" bIns="62367" rtlCol="0" anchor="ctr"/>
+          <a:lstStyle/>
+          <a:p>
+            <a:pPr algn="ctr"/>
+            <a:r>
+              <a:rPr lang="ru-RU" sz="1400" dirty="0"/>
+              <a:t>Сосаться с Германией</a:t>
+            </a:r>
+          </a:p>
+        </p:txBody>
+      </p:sp>
+      <p:sp>
+        <p:nvSpPr>
+          <p:cNvPr id="54" name="Прямоугольник 53">
+            <a:extLst>
+              <a:ext uri="{FF2B5EF4-FFF2-40B4-BE49-F238E27FC236}">
+                <a16:creationId xmlns:a16="http://schemas.microsoft.com/office/drawing/2014/main" id="{C10A7B2B-BDA8-4B77-B84E-51353014AAC6}"/>
+              </a:ext>
+            </a:extLst>
+          </p:cNvPr>
+          <p:cNvSpPr/>
+          <p:nvPr/>
+        </p:nvSpPr>
+        <p:spPr>
+          <a:xfrm>
+            <a:off x="35432222" y="6328244"/>
+            <a:ext cx="2115918" cy="1080000"/>
+          </a:xfrm>
+          <a:prstGeom prst="rect">
+            <a:avLst/>
+          </a:prstGeom>
+          <a:solidFill>
+            <a:schemeClr val="accent3">
+              <a:lumMod val="60000"/>
+              <a:lumOff val="40000"/>
+            </a:schemeClr>
+          </a:solidFill>
+          <a:ln w="28575"/>
+        </p:spPr>
+        <p:style>
+          <a:lnRef idx="2">
+            <a:schemeClr val="accent1"/>
+          </a:lnRef>
+          <a:fillRef idx="1">
+            <a:schemeClr val="lt1"/>
+          </a:fillRef>
+          <a:effectRef idx="0">
+            <a:schemeClr val="accent1"/>
+          </a:effectRef>
+          <a:fontRef idx="minor">
+            <a:schemeClr val="dk1"/>
+          </a:fontRef>
+        </p:style>
+        <p:txBody>
+          <a:bodyPr lIns="124733" tIns="62367" rIns="124733" bIns="62367" rtlCol="0" anchor="ctr"/>
+          <a:lstStyle/>
+          <a:p>
+            <a:pPr algn="ctr"/>
+            <a:r>
+              <a:rPr lang="ru-RU" sz="1400" dirty="0"/>
+              <a:t>Чёрные бригады </a:t>
+            </a:r>
+            <a:r>
+              <a:rPr lang="ru-RU" sz="600" dirty="0"/>
+              <a:t>(В августе 1940 года </a:t>
+            </a:r>
+            <a:r>
+              <a:rPr lang="ru-RU" sz="600" dirty="0" err="1"/>
+              <a:t>униформированное</a:t>
+            </a:r>
+            <a:r>
+              <a:rPr lang="ru-RU" sz="600" dirty="0"/>
+              <a:t> подразделение ВНВ, Серая бригада под командованием Германа </a:t>
+            </a:r>
+            <a:r>
+              <a:rPr lang="ru-RU" sz="600" dirty="0" err="1"/>
+              <a:t>ван</a:t>
+            </a:r>
+            <a:r>
+              <a:rPr lang="ru-RU" sz="600" dirty="0"/>
+              <a:t> </a:t>
+            </a:r>
+            <a:r>
+              <a:rPr lang="ru-RU" sz="600" dirty="0" err="1"/>
+              <a:t>Отегема</a:t>
+            </a:r>
+            <a:r>
+              <a:rPr lang="ru-RU" sz="600" dirty="0"/>
+              <a:t> , было переименовано в Черную бригаду, а позже — в </a:t>
+            </a:r>
+            <a:r>
+              <a:rPr lang="ru-RU" sz="600" dirty="0" err="1"/>
+              <a:t>Dietsche</a:t>
+            </a:r>
+            <a:r>
+              <a:rPr lang="ru-RU" sz="600" dirty="0"/>
+              <a:t> </a:t>
+            </a:r>
+            <a:r>
+              <a:rPr lang="ru-RU" sz="600" dirty="0" err="1"/>
+              <a:t>Militie</a:t>
+            </a:r>
+            <a:r>
+              <a:rPr lang="ru-RU" sz="600" dirty="0"/>
+              <a:t> — Черную бригаду . 10 ноября 1940 года </a:t>
+            </a:r>
+            <a:r>
+              <a:rPr lang="ru-RU" sz="600" dirty="0" err="1"/>
+              <a:t>Штаф</a:t>
+            </a:r>
+            <a:r>
+              <a:rPr lang="ru-RU" sz="600" dirty="0"/>
+              <a:t> </a:t>
+            </a:r>
+            <a:r>
+              <a:rPr lang="ru-RU" sz="600" dirty="0" err="1"/>
+              <a:t>Деклерк</a:t>
+            </a:r>
+            <a:r>
+              <a:rPr lang="ru-RU" sz="600" dirty="0"/>
+              <a:t> публично заявил в своей речи, что ВНВ готова прийти на помощь немцам и выразил доверие фюреру Адольфу Гитлеру .)</a:t>
+            </a:r>
+            <a:endParaRPr lang="ru-RU" sz="1400" dirty="0"/>
+          </a:p>
+        </p:txBody>
+      </p:sp>
+      <p:sp>
+        <p:nvSpPr>
+          <p:cNvPr id="55" name="Прямоугольник 54">
+            <a:extLst>
+              <a:ext uri="{FF2B5EF4-FFF2-40B4-BE49-F238E27FC236}">
+                <a16:creationId xmlns:a16="http://schemas.microsoft.com/office/drawing/2014/main" id="{1F56BCFC-53D1-4F1E-8365-632BEED843B3}"/>
+              </a:ext>
+            </a:extLst>
+          </p:cNvPr>
+          <p:cNvSpPr/>
+          <p:nvPr/>
+        </p:nvSpPr>
+        <p:spPr>
+          <a:xfrm>
+            <a:off x="31389612" y="1764956"/>
+            <a:ext cx="2115918" cy="1080000"/>
+          </a:xfrm>
+          <a:prstGeom prst="rect">
+            <a:avLst/>
+          </a:prstGeom>
+          <a:solidFill>
+            <a:schemeClr val="accent3">
+              <a:lumMod val="60000"/>
+              <a:lumOff val="40000"/>
+            </a:schemeClr>
+          </a:solidFill>
+          <a:ln w="28575"/>
+        </p:spPr>
+        <p:style>
+          <a:lnRef idx="2">
+            <a:schemeClr val="accent1"/>
+          </a:lnRef>
+          <a:fillRef idx="1">
+            <a:schemeClr val="lt1"/>
+          </a:fillRef>
+          <a:effectRef idx="0">
+            <a:schemeClr val="accent1"/>
+          </a:effectRef>
+          <a:fontRef idx="minor">
+            <a:schemeClr val="dk1"/>
+          </a:fontRef>
+        </p:style>
+        <p:txBody>
+          <a:bodyPr lIns="124733" tIns="62367" rIns="124733" bIns="62367" rtlCol="0" anchor="ctr"/>
+          <a:lstStyle/>
+          <a:p>
+            <a:pPr algn="ctr"/>
+            <a:r>
+              <a:rPr lang="ru-RU" sz="500" dirty="0"/>
+              <a:t>« Фландрия должна интегрироваться в Новый порядок, рожденный национал-социалистической революцией. Цель VNV — установить новый порядок во Фландрии. [...] Этот новый политический порядок должен быть установлен, с одной стороны, на принципе лидерства, а с другой — на устранении и искоренении всех институтов (включая парламент), групп (включая профсоюзы) или выражений, которые посягают на органическое единство Национального сообщества или подрывают его. [...] Между тем, у нас есть и другие обязанности: а) борьба с подстрекательством; б) борьба с ростовщичеством; в) борьба против евреев » .</a:t>
+            </a:r>
           </a:p>
         </p:txBody>
       </p:sp>
@@ -7070,7 +7863,7 @@
           <p:cNvPr id="7" name="Прямоугольник 6">
             <a:extLst>
               <a:ext uri="{FF2B5EF4-FFF2-40B4-BE49-F238E27FC236}">
-                <a16:creationId xmlns:a16="http://schemas.microsoft.com/office/drawing/2014/main" xmlns="" id="{0E0B5DFF-ABEB-4917-9207-7644A0AF99FF}"/>
+                <a16:creationId xmlns:a16="http://schemas.microsoft.com/office/drawing/2014/main" id="{0E0B5DFF-ABEB-4917-9207-7644A0AF99FF}"/>
               </a:ext>
             </a:extLst>
           </p:cNvPr>
@@ -7227,7 +8020,7 @@
           <p:cNvPr id="8" name="Прямоугольник 7">
             <a:extLst>
               <a:ext uri="{FF2B5EF4-FFF2-40B4-BE49-F238E27FC236}">
-                <a16:creationId xmlns:a16="http://schemas.microsoft.com/office/drawing/2014/main" xmlns="" id="{51A90983-AEB8-411D-878C-CCEC94B93ACC}"/>
+                <a16:creationId xmlns:a16="http://schemas.microsoft.com/office/drawing/2014/main" id="{51A90983-AEB8-411D-878C-CCEC94B93ACC}"/>
               </a:ext>
             </a:extLst>
           </p:cNvPr>
@@ -7444,7 +8237,7 @@
           <p:cNvPr id="9" name="Прямоугольник 8">
             <a:extLst>
               <a:ext uri="{FF2B5EF4-FFF2-40B4-BE49-F238E27FC236}">
-                <a16:creationId xmlns:a16="http://schemas.microsoft.com/office/drawing/2014/main" xmlns="" id="{FDBBE88F-33FD-45C0-8BC5-DB650DA8B43D}"/>
+                <a16:creationId xmlns:a16="http://schemas.microsoft.com/office/drawing/2014/main" id="{FDBBE88F-33FD-45C0-8BC5-DB650DA8B43D}"/>
               </a:ext>
             </a:extLst>
           </p:cNvPr>
@@ -7500,7 +8293,7 @@
           <p:cNvPr id="10" name="Прямоугольник 9">
             <a:extLst>
               <a:ext uri="{FF2B5EF4-FFF2-40B4-BE49-F238E27FC236}">
-                <a16:creationId xmlns:a16="http://schemas.microsoft.com/office/drawing/2014/main" xmlns="" id="{F49CDE11-2B29-438E-9079-C65CDE3419A8}"/>
+                <a16:creationId xmlns:a16="http://schemas.microsoft.com/office/drawing/2014/main" id="{F49CDE11-2B29-438E-9079-C65CDE3419A8}"/>
               </a:ext>
             </a:extLst>
           </p:cNvPr>
@@ -7609,7 +8402,7 @@
           <p:cNvPr id="11" name="Прямоугольник 10">
             <a:extLst>
               <a:ext uri="{FF2B5EF4-FFF2-40B4-BE49-F238E27FC236}">
-                <a16:creationId xmlns:a16="http://schemas.microsoft.com/office/drawing/2014/main" xmlns="" id="{FD5D8F22-B368-4D19-8953-D59AA342EDA5}"/>
+                <a16:creationId xmlns:a16="http://schemas.microsoft.com/office/drawing/2014/main" id="{FD5D8F22-B368-4D19-8953-D59AA342EDA5}"/>
               </a:ext>
             </a:extLst>
           </p:cNvPr>
@@ -7669,7 +8462,7 @@
           <p:cNvPr id="12" name="Прямоугольник 11">
             <a:extLst>
               <a:ext uri="{FF2B5EF4-FFF2-40B4-BE49-F238E27FC236}">
-                <a16:creationId xmlns:a16="http://schemas.microsoft.com/office/drawing/2014/main" xmlns="" id="{1C828EEE-A81C-4FC3-B78B-DE37F620B918}"/>
+                <a16:creationId xmlns:a16="http://schemas.microsoft.com/office/drawing/2014/main" id="{1C828EEE-A81C-4FC3-B78B-DE37F620B918}"/>
               </a:ext>
             </a:extLst>
           </p:cNvPr>
@@ -7725,7 +8518,7 @@
           <p:cNvPr id="13" name="Прямоугольник 12">
             <a:extLst>
               <a:ext uri="{FF2B5EF4-FFF2-40B4-BE49-F238E27FC236}">
-                <a16:creationId xmlns:a16="http://schemas.microsoft.com/office/drawing/2014/main" xmlns="" id="{17F6A0E1-6BEB-495C-B20A-399B8A628F4D}"/>
+                <a16:creationId xmlns:a16="http://schemas.microsoft.com/office/drawing/2014/main" id="{17F6A0E1-6BEB-495C-B20A-399B8A628F4D}"/>
               </a:ext>
             </a:extLst>
           </p:cNvPr>
@@ -7850,7 +8643,7 @@
           <p:cNvPr id="14" name="Прямоугольник 13">
             <a:extLst>
               <a:ext uri="{FF2B5EF4-FFF2-40B4-BE49-F238E27FC236}">
-                <a16:creationId xmlns:a16="http://schemas.microsoft.com/office/drawing/2014/main" xmlns="" id="{08ACEFEB-E675-4D60-995C-46AB2E2C0991}"/>
+                <a16:creationId xmlns:a16="http://schemas.microsoft.com/office/drawing/2014/main" id="{08ACEFEB-E675-4D60-995C-46AB2E2C0991}"/>
               </a:ext>
             </a:extLst>
           </p:cNvPr>
@@ -8022,7 +8815,7 @@
           <p:cNvPr id="15" name="Прямоугольник 14">
             <a:extLst>
               <a:ext uri="{FF2B5EF4-FFF2-40B4-BE49-F238E27FC236}">
-                <a16:creationId xmlns:a16="http://schemas.microsoft.com/office/drawing/2014/main" xmlns="" id="{4FB11C64-6A47-4C4B-B70B-5C94A624A164}"/>
+                <a16:creationId xmlns:a16="http://schemas.microsoft.com/office/drawing/2014/main" id="{4FB11C64-6A47-4C4B-B70B-5C94A624A164}"/>
               </a:ext>
             </a:extLst>
           </p:cNvPr>
@@ -8227,7 +9020,7 @@
           <p:cNvPr id="16" name="Прямоугольник 15">
             <a:extLst>
               <a:ext uri="{FF2B5EF4-FFF2-40B4-BE49-F238E27FC236}">
-                <a16:creationId xmlns:a16="http://schemas.microsoft.com/office/drawing/2014/main" xmlns="" id="{E4306019-581B-4A18-87BF-3B7F8357B066}"/>
+                <a16:creationId xmlns:a16="http://schemas.microsoft.com/office/drawing/2014/main" id="{E4306019-581B-4A18-87BF-3B7F8357B066}"/>
               </a:ext>
             </a:extLst>
           </p:cNvPr>
@@ -8283,7 +9076,7 @@
           <p:cNvPr id="17" name="Прямоугольник 16">
             <a:extLst>
               <a:ext uri="{FF2B5EF4-FFF2-40B4-BE49-F238E27FC236}">
-                <a16:creationId xmlns:a16="http://schemas.microsoft.com/office/drawing/2014/main" xmlns="" id="{E9E5E8BF-D995-4901-9A14-BDDD65CD7BB5}"/>
+                <a16:creationId xmlns:a16="http://schemas.microsoft.com/office/drawing/2014/main" id="{E9E5E8BF-D995-4901-9A14-BDDD65CD7BB5}"/>
               </a:ext>
             </a:extLst>
           </p:cNvPr>
@@ -8340,7 +9133,7 @@
           <p:cNvPr id="18" name="Прямоугольник 17">
             <a:extLst>
               <a:ext uri="{FF2B5EF4-FFF2-40B4-BE49-F238E27FC236}">
-                <a16:creationId xmlns:a16="http://schemas.microsoft.com/office/drawing/2014/main" xmlns="" id="{2E359796-D508-420A-B340-9B6DD34480FF}"/>
+                <a16:creationId xmlns:a16="http://schemas.microsoft.com/office/drawing/2014/main" id="{2E359796-D508-420A-B340-9B6DD34480FF}"/>
               </a:ext>
             </a:extLst>
           </p:cNvPr>
@@ -8409,7 +9202,7 @@
           <p:cNvPr id="19" name="Прямоугольник 18">
             <a:extLst>
               <a:ext uri="{FF2B5EF4-FFF2-40B4-BE49-F238E27FC236}">
-                <a16:creationId xmlns:a16="http://schemas.microsoft.com/office/drawing/2014/main" xmlns="" id="{56B6E708-5271-4862-8558-AB25F9A3CD4A}"/>
+                <a16:creationId xmlns:a16="http://schemas.microsoft.com/office/drawing/2014/main" id="{56B6E708-5271-4862-8558-AB25F9A3CD4A}"/>
               </a:ext>
             </a:extLst>
           </p:cNvPr>
@@ -8526,7 +9319,7 @@
           <p:cNvPr id="20" name="Прямоугольник 19">
             <a:extLst>
               <a:ext uri="{FF2B5EF4-FFF2-40B4-BE49-F238E27FC236}">
-                <a16:creationId xmlns:a16="http://schemas.microsoft.com/office/drawing/2014/main" xmlns="" id="{2680FF36-1ECB-431C-B518-9AFCFDA654B2}"/>
+                <a16:creationId xmlns:a16="http://schemas.microsoft.com/office/drawing/2014/main" id="{2680FF36-1ECB-431C-B518-9AFCFDA654B2}"/>
               </a:ext>
             </a:extLst>
           </p:cNvPr>
@@ -8643,7 +9436,7 @@
           <p:cNvPr id="21" name="Прямоугольник 20">
             <a:extLst>
               <a:ext uri="{FF2B5EF4-FFF2-40B4-BE49-F238E27FC236}">
-                <a16:creationId xmlns:a16="http://schemas.microsoft.com/office/drawing/2014/main" xmlns="" id="{1BE05CA1-7E0B-485D-819A-704F80401958}"/>
+                <a16:creationId xmlns:a16="http://schemas.microsoft.com/office/drawing/2014/main" id="{1BE05CA1-7E0B-485D-819A-704F80401958}"/>
               </a:ext>
             </a:extLst>
           </p:cNvPr>
@@ -8740,7 +9533,7 @@
           <p:cNvPr id="22" name="Прямоугольник 21">
             <a:extLst>
               <a:ext uri="{FF2B5EF4-FFF2-40B4-BE49-F238E27FC236}">
-                <a16:creationId xmlns:a16="http://schemas.microsoft.com/office/drawing/2014/main" xmlns="" id="{2A0E6E2C-7B78-48F8-8D54-530BEA3D0C1F}"/>
+                <a16:creationId xmlns:a16="http://schemas.microsoft.com/office/drawing/2014/main" id="{2A0E6E2C-7B78-48F8-8D54-530BEA3D0C1F}"/>
               </a:ext>
             </a:extLst>
           </p:cNvPr>
@@ -8788,7 +9581,7 @@
           <p:cNvPr id="23" name="Прямоугольник 22">
             <a:extLst>
               <a:ext uri="{FF2B5EF4-FFF2-40B4-BE49-F238E27FC236}">
-                <a16:creationId xmlns:a16="http://schemas.microsoft.com/office/drawing/2014/main" xmlns="" id="{BA93E377-6A12-4528-9AFD-05DFCD4EE6EC}"/>
+                <a16:creationId xmlns:a16="http://schemas.microsoft.com/office/drawing/2014/main" id="{BA93E377-6A12-4528-9AFD-05DFCD4EE6EC}"/>
               </a:ext>
             </a:extLst>
           </p:cNvPr>
@@ -8836,7 +9629,7 @@
           <p:cNvPr id="24" name="Прямоугольник 23">
             <a:extLst>
               <a:ext uri="{FF2B5EF4-FFF2-40B4-BE49-F238E27FC236}">
-                <a16:creationId xmlns:a16="http://schemas.microsoft.com/office/drawing/2014/main" xmlns="" id="{CEC72D80-A4AD-41E8-85D1-786A128A79B3}"/>
+                <a16:creationId xmlns:a16="http://schemas.microsoft.com/office/drawing/2014/main" id="{CEC72D80-A4AD-41E8-85D1-786A128A79B3}"/>
               </a:ext>
             </a:extLst>
           </p:cNvPr>
@@ -8884,7 +9677,7 @@
           <p:cNvPr id="25" name="Прямоугольник 24">
             <a:extLst>
               <a:ext uri="{FF2B5EF4-FFF2-40B4-BE49-F238E27FC236}">
-                <a16:creationId xmlns:a16="http://schemas.microsoft.com/office/drawing/2014/main" xmlns="" id="{F08AAA0F-EF8D-4C3B-9D0F-BC29CCF04137}"/>
+                <a16:creationId xmlns:a16="http://schemas.microsoft.com/office/drawing/2014/main" id="{F08AAA0F-EF8D-4C3B-9D0F-BC29CCF04137}"/>
               </a:ext>
             </a:extLst>
           </p:cNvPr>
@@ -8932,7 +9725,7 @@
           <p:cNvPr id="26" name="Прямоугольник 25">
             <a:extLst>
               <a:ext uri="{FF2B5EF4-FFF2-40B4-BE49-F238E27FC236}">
-                <a16:creationId xmlns:a16="http://schemas.microsoft.com/office/drawing/2014/main" xmlns="" id="{3B5FB243-8F52-48F2-8A87-65479D2CDCB6}"/>
+                <a16:creationId xmlns:a16="http://schemas.microsoft.com/office/drawing/2014/main" id="{3B5FB243-8F52-48F2-8A87-65479D2CDCB6}"/>
               </a:ext>
             </a:extLst>
           </p:cNvPr>
@@ -8980,7 +9773,7 @@
           <p:cNvPr id="27" name="Прямоугольник 26">
             <a:extLst>
               <a:ext uri="{FF2B5EF4-FFF2-40B4-BE49-F238E27FC236}">
-                <a16:creationId xmlns:a16="http://schemas.microsoft.com/office/drawing/2014/main" xmlns="" id="{0E4FDC92-0409-4738-B9A6-9F0E90156B62}"/>
+                <a16:creationId xmlns:a16="http://schemas.microsoft.com/office/drawing/2014/main" id="{0E4FDC92-0409-4738-B9A6-9F0E90156B62}"/>
               </a:ext>
             </a:extLst>
           </p:cNvPr>
@@ -9047,7 +9840,7 @@
           <p:cNvPr id="28" name="Прямоугольник 27">
             <a:extLst>
               <a:ext uri="{FF2B5EF4-FFF2-40B4-BE49-F238E27FC236}">
-                <a16:creationId xmlns:a16="http://schemas.microsoft.com/office/drawing/2014/main" xmlns="" id="{1D07C853-B2DD-4982-BF11-511B650715D7}"/>
+                <a16:creationId xmlns:a16="http://schemas.microsoft.com/office/drawing/2014/main" id="{1D07C853-B2DD-4982-BF11-511B650715D7}"/>
               </a:ext>
             </a:extLst>
           </p:cNvPr>
@@ -9096,7 +9889,7 @@
               <a:t>Renard</a:t>
             </a:r>
             <a:r>
-              <a:rPr lang="en-US" sz="1400" dirty="0" smtClean="0"/>
+              <a:rPr lang="en-US" sz="1400" dirty="0"/>
               <a:t>»</a:t>
             </a:r>
             <a:endParaRPr lang="ru-RU" sz="1400" dirty="0"/>
@@ -9108,7 +9901,7 @@
           <p:cNvPr id="29" name="Прямоугольник 28">
             <a:extLst>
               <a:ext uri="{FF2B5EF4-FFF2-40B4-BE49-F238E27FC236}">
-                <a16:creationId xmlns:a16="http://schemas.microsoft.com/office/drawing/2014/main" xmlns="" id="{D603320C-9192-4F3C-8114-F303A7CD6793}"/>
+                <a16:creationId xmlns:a16="http://schemas.microsoft.com/office/drawing/2014/main" id="{D603320C-9192-4F3C-8114-F303A7CD6793}"/>
               </a:ext>
             </a:extLst>
           </p:cNvPr>
@@ -9217,7 +10010,7 @@
           <p:cNvPr id="30" name="Прямоугольник 29">
             <a:extLst>
               <a:ext uri="{FF2B5EF4-FFF2-40B4-BE49-F238E27FC236}">
-                <a16:creationId xmlns:a16="http://schemas.microsoft.com/office/drawing/2014/main" xmlns="" id="{F50CFCD5-56FB-451D-9C26-A4B05088EFA7}"/>
+                <a16:creationId xmlns:a16="http://schemas.microsoft.com/office/drawing/2014/main" id="{F50CFCD5-56FB-451D-9C26-A4B05088EFA7}"/>
               </a:ext>
             </a:extLst>
           </p:cNvPr>
@@ -9358,7 +10151,7 @@
           <p:cNvPr id="31" name="Прямоугольник 30">
             <a:extLst>
               <a:ext uri="{FF2B5EF4-FFF2-40B4-BE49-F238E27FC236}">
-                <a16:creationId xmlns:a16="http://schemas.microsoft.com/office/drawing/2014/main" xmlns="" id="{9B2453BF-815C-4325-B8B8-E6656C3248AB}"/>
+                <a16:creationId xmlns:a16="http://schemas.microsoft.com/office/drawing/2014/main" id="{9B2453BF-815C-4325-B8B8-E6656C3248AB}"/>
               </a:ext>
             </a:extLst>
           </p:cNvPr>
@@ -9419,7 +10212,7 @@
           <p:cNvPr id="32" name="Прямоугольник 31">
             <a:extLst>
               <a:ext uri="{FF2B5EF4-FFF2-40B4-BE49-F238E27FC236}">
-                <a16:creationId xmlns:a16="http://schemas.microsoft.com/office/drawing/2014/main" xmlns="" id="{7DF6CD79-8349-4E75-89EF-5208B3487C7C}"/>
+                <a16:creationId xmlns:a16="http://schemas.microsoft.com/office/drawing/2014/main" id="{7DF6CD79-8349-4E75-89EF-5208B3487C7C}"/>
               </a:ext>
             </a:extLst>
           </p:cNvPr>
@@ -9516,7 +10309,7 @@
           <p:cNvPr id="33" name="Прямоугольник 32">
             <a:extLst>
               <a:ext uri="{FF2B5EF4-FFF2-40B4-BE49-F238E27FC236}">
-                <a16:creationId xmlns:a16="http://schemas.microsoft.com/office/drawing/2014/main" xmlns="" id="{5ECB5972-DF2F-44B1-9C1F-35B746F0DE1F}"/>
+                <a16:creationId xmlns:a16="http://schemas.microsoft.com/office/drawing/2014/main" id="{5ECB5972-DF2F-44B1-9C1F-35B746F0DE1F}"/>
               </a:ext>
             </a:extLst>
           </p:cNvPr>
@@ -9609,7 +10402,7 @@
           <p:cNvPr id="34" name="Прямоугольник 33">
             <a:extLst>
               <a:ext uri="{FF2B5EF4-FFF2-40B4-BE49-F238E27FC236}">
-                <a16:creationId xmlns:a16="http://schemas.microsoft.com/office/drawing/2014/main" xmlns="" id="{1FB752A9-4E9A-49DC-BBFD-B10E15AF187E}"/>
+                <a16:creationId xmlns:a16="http://schemas.microsoft.com/office/drawing/2014/main" id="{1FB752A9-4E9A-49DC-BBFD-B10E15AF187E}"/>
               </a:ext>
             </a:extLst>
           </p:cNvPr>
@@ -9702,7 +10495,7 @@
           <p:cNvPr id="35" name="Прямоугольник 34">
             <a:extLst>
               <a:ext uri="{FF2B5EF4-FFF2-40B4-BE49-F238E27FC236}">
-                <a16:creationId xmlns:a16="http://schemas.microsoft.com/office/drawing/2014/main" xmlns="" id="{ABCFBB8E-0600-4889-AF1E-93958E5ECF80}"/>
+                <a16:creationId xmlns:a16="http://schemas.microsoft.com/office/drawing/2014/main" id="{ABCFBB8E-0600-4889-AF1E-93958E5ECF80}"/>
               </a:ext>
             </a:extLst>
           </p:cNvPr>
@@ -9787,7 +10580,7 @@
           <p:cNvPr id="36" name="Прямая соединительная линия 35">
             <a:extLst>
               <a:ext uri="{FF2B5EF4-FFF2-40B4-BE49-F238E27FC236}">
-                <a16:creationId xmlns:a16="http://schemas.microsoft.com/office/drawing/2014/main" xmlns="" id="{60EBFE69-647A-429E-AC54-DA932720C39C}"/>
+                <a16:creationId xmlns:a16="http://schemas.microsoft.com/office/drawing/2014/main" id="{60EBFE69-647A-429E-AC54-DA932720C39C}"/>
               </a:ext>
             </a:extLst>
           </p:cNvPr>
@@ -9832,7 +10625,7 @@
           <p:cNvPr id="37" name="Прямая соединительная линия 36">
             <a:extLst>
               <a:ext uri="{FF2B5EF4-FFF2-40B4-BE49-F238E27FC236}">
-                <a16:creationId xmlns:a16="http://schemas.microsoft.com/office/drawing/2014/main" xmlns="" id="{BC399F68-80AE-433B-AD6B-370A5EE7AE92}"/>
+                <a16:creationId xmlns:a16="http://schemas.microsoft.com/office/drawing/2014/main" id="{BC399F68-80AE-433B-AD6B-370A5EE7AE92}"/>
               </a:ext>
             </a:extLst>
           </p:cNvPr>
@@ -9877,7 +10670,7 @@
           <p:cNvPr id="38" name="Прямоугольник 37">
             <a:extLst>
               <a:ext uri="{FF2B5EF4-FFF2-40B4-BE49-F238E27FC236}">
-                <a16:creationId xmlns:a16="http://schemas.microsoft.com/office/drawing/2014/main" xmlns="" id="{BC23B88D-BA3D-4683-96F7-82A71C5C9056}"/>
+                <a16:creationId xmlns:a16="http://schemas.microsoft.com/office/drawing/2014/main" id="{BC23B88D-BA3D-4683-96F7-82A71C5C9056}"/>
               </a:ext>
             </a:extLst>
           </p:cNvPr>
@@ -9961,7 +10754,7 @@
           <p:cNvPr id="39" name="Прямая соединительная линия 38">
             <a:extLst>
               <a:ext uri="{FF2B5EF4-FFF2-40B4-BE49-F238E27FC236}">
-                <a16:creationId xmlns:a16="http://schemas.microsoft.com/office/drawing/2014/main" xmlns="" id="{A57BCE41-DB05-40E8-A017-58EEF93FBE78}"/>
+                <a16:creationId xmlns:a16="http://schemas.microsoft.com/office/drawing/2014/main" id="{A57BCE41-DB05-40E8-A017-58EEF93FBE78}"/>
               </a:ext>
             </a:extLst>
           </p:cNvPr>
@@ -10006,7 +10799,7 @@
           <p:cNvPr id="40" name="Прямоугольник 39">
             <a:extLst>
               <a:ext uri="{FF2B5EF4-FFF2-40B4-BE49-F238E27FC236}">
-                <a16:creationId xmlns:a16="http://schemas.microsoft.com/office/drawing/2014/main" xmlns="" id="{616C7DF2-824D-4388-BAF2-9351B348DB26}"/>
+                <a16:creationId xmlns:a16="http://schemas.microsoft.com/office/drawing/2014/main" id="{616C7DF2-824D-4388-BAF2-9351B348DB26}"/>
               </a:ext>
             </a:extLst>
           </p:cNvPr>
@@ -10054,7 +10847,7 @@
           <p:cNvPr id="41" name="Прямоугольник 40">
             <a:extLst>
               <a:ext uri="{FF2B5EF4-FFF2-40B4-BE49-F238E27FC236}">
-                <a16:creationId xmlns:a16="http://schemas.microsoft.com/office/drawing/2014/main" xmlns="" id="{CA9664A1-8081-4A0B-847E-404600F6E371}"/>
+                <a16:creationId xmlns:a16="http://schemas.microsoft.com/office/drawing/2014/main" id="{CA9664A1-8081-4A0B-847E-404600F6E371}"/>
               </a:ext>
             </a:extLst>
           </p:cNvPr>
@@ -10110,7 +10903,7 @@
           <p:cNvPr id="42" name="Прямоугольник 41">
             <a:extLst>
               <a:ext uri="{FF2B5EF4-FFF2-40B4-BE49-F238E27FC236}">
-                <a16:creationId xmlns:a16="http://schemas.microsoft.com/office/drawing/2014/main" xmlns="" id="{76A83F02-0AC8-4720-BA0D-43C55873A1F9}"/>
+                <a16:creationId xmlns:a16="http://schemas.microsoft.com/office/drawing/2014/main" id="{76A83F02-0AC8-4720-BA0D-43C55873A1F9}"/>
               </a:ext>
             </a:extLst>
           </p:cNvPr>
@@ -10166,7 +10959,7 @@
           <p:cNvPr id="43" name="Прямая соединительная линия 42">
             <a:extLst>
               <a:ext uri="{FF2B5EF4-FFF2-40B4-BE49-F238E27FC236}">
-                <a16:creationId xmlns:a16="http://schemas.microsoft.com/office/drawing/2014/main" xmlns="" id="{0A35F6D0-13A2-4541-BAFB-3E0D21244ECA}"/>
+                <a16:creationId xmlns:a16="http://schemas.microsoft.com/office/drawing/2014/main" id="{0A35F6D0-13A2-4541-BAFB-3E0D21244ECA}"/>
               </a:ext>
             </a:extLst>
           </p:cNvPr>
@@ -10211,7 +11004,7 @@
           <p:cNvPr id="44" name="Прямая соединительная линия 43">
             <a:extLst>
               <a:ext uri="{FF2B5EF4-FFF2-40B4-BE49-F238E27FC236}">
-                <a16:creationId xmlns:a16="http://schemas.microsoft.com/office/drawing/2014/main" xmlns="" id="{878D9B60-E30F-48F7-AF3A-F9D13F7EB637}"/>
+                <a16:creationId xmlns:a16="http://schemas.microsoft.com/office/drawing/2014/main" id="{878D9B60-E30F-48F7-AF3A-F9D13F7EB637}"/>
               </a:ext>
             </a:extLst>
           </p:cNvPr>
@@ -10256,7 +11049,7 @@
           <p:cNvPr id="45" name="Прямоугольник 44">
             <a:extLst>
               <a:ext uri="{FF2B5EF4-FFF2-40B4-BE49-F238E27FC236}">
-                <a16:creationId xmlns:a16="http://schemas.microsoft.com/office/drawing/2014/main" xmlns="" id="{9C36B8C8-DB85-4762-B3CC-B09935511617}"/>
+                <a16:creationId xmlns:a16="http://schemas.microsoft.com/office/drawing/2014/main" id="{9C36B8C8-DB85-4762-B3CC-B09935511617}"/>
               </a:ext>
             </a:extLst>
           </p:cNvPr>
@@ -10369,7 +11162,7 @@
           <p:cNvPr id="46" name="Прямоугольник 45">
             <a:extLst>
               <a:ext uri="{FF2B5EF4-FFF2-40B4-BE49-F238E27FC236}">
-                <a16:creationId xmlns:a16="http://schemas.microsoft.com/office/drawing/2014/main" xmlns="" id="{8EDB5027-76F8-4F26-B70B-62E851625221}"/>
+                <a16:creationId xmlns:a16="http://schemas.microsoft.com/office/drawing/2014/main" id="{8EDB5027-76F8-4F26-B70B-62E851625221}"/>
               </a:ext>
             </a:extLst>
           </p:cNvPr>
@@ -10494,7 +11287,7 @@
           <p:cNvPr id="47" name="Прямоугольник 46">
             <a:extLst>
               <a:ext uri="{FF2B5EF4-FFF2-40B4-BE49-F238E27FC236}">
-                <a16:creationId xmlns:a16="http://schemas.microsoft.com/office/drawing/2014/main" xmlns="" id="{A6C53A3B-D171-4BA3-81CD-BBB29B60A2E2}"/>
+                <a16:creationId xmlns:a16="http://schemas.microsoft.com/office/drawing/2014/main" id="{A6C53A3B-D171-4BA3-81CD-BBB29B60A2E2}"/>
               </a:ext>
             </a:extLst>
           </p:cNvPr>
@@ -10547,7 +11340,7 @@
           <p:cNvPr id="48" name="Прямоугольник 47">
             <a:extLst>
               <a:ext uri="{FF2B5EF4-FFF2-40B4-BE49-F238E27FC236}">
-                <a16:creationId xmlns:a16="http://schemas.microsoft.com/office/drawing/2014/main" xmlns="" id="{050C0F0F-0F5F-4137-8947-062470264E5C}"/>
+                <a16:creationId xmlns:a16="http://schemas.microsoft.com/office/drawing/2014/main" id="{050C0F0F-0F5F-4137-8947-062470264E5C}"/>
               </a:ext>
             </a:extLst>
           </p:cNvPr>
@@ -10600,7 +11393,7 @@
           <p:cNvPr id="49" name="Прямоугольник 48">
             <a:extLst>
               <a:ext uri="{FF2B5EF4-FFF2-40B4-BE49-F238E27FC236}">
-                <a16:creationId xmlns:a16="http://schemas.microsoft.com/office/drawing/2014/main" xmlns="" id="{76AD3F43-559A-4E69-95CF-A58B1D4643BB}"/>
+                <a16:creationId xmlns:a16="http://schemas.microsoft.com/office/drawing/2014/main" id="{76AD3F43-559A-4E69-95CF-A58B1D4643BB}"/>
               </a:ext>
             </a:extLst>
           </p:cNvPr>
@@ -10693,7 +11486,7 @@
           <p:cNvPr id="50" name="Соединительная линия уступом 523">
             <a:extLst>
               <a:ext uri="{FF2B5EF4-FFF2-40B4-BE49-F238E27FC236}">
-                <a16:creationId xmlns:a16="http://schemas.microsoft.com/office/drawing/2014/main" xmlns="" id="{2A25F4B4-02B5-440D-93F5-CFBC12D61896}"/>
+                <a16:creationId xmlns:a16="http://schemas.microsoft.com/office/drawing/2014/main" id="{2A25F4B4-02B5-440D-93F5-CFBC12D61896}"/>
               </a:ext>
             </a:extLst>
           </p:cNvPr>
@@ -10738,7 +11531,7 @@
           <p:cNvPr id="51" name="Соединительная линия уступом 523">
             <a:extLst>
               <a:ext uri="{FF2B5EF4-FFF2-40B4-BE49-F238E27FC236}">
-                <a16:creationId xmlns:a16="http://schemas.microsoft.com/office/drawing/2014/main" xmlns="" id="{C303E358-F5A9-4491-95C6-7400F87B3853}"/>
+                <a16:creationId xmlns:a16="http://schemas.microsoft.com/office/drawing/2014/main" id="{C303E358-F5A9-4491-95C6-7400F87B3853}"/>
               </a:ext>
             </a:extLst>
           </p:cNvPr>
@@ -10783,7 +11576,7 @@
           <p:cNvPr id="52" name="Соединительная линия уступом 523">
             <a:extLst>
               <a:ext uri="{FF2B5EF4-FFF2-40B4-BE49-F238E27FC236}">
-                <a16:creationId xmlns:a16="http://schemas.microsoft.com/office/drawing/2014/main" xmlns="" id="{E2C02A62-C523-45E8-8EB1-CC2016531DBF}"/>
+                <a16:creationId xmlns:a16="http://schemas.microsoft.com/office/drawing/2014/main" id="{E2C02A62-C523-45E8-8EB1-CC2016531DBF}"/>
               </a:ext>
             </a:extLst>
           </p:cNvPr>
@@ -10828,7 +11621,7 @@
           <p:cNvPr id="53" name="Соединительная линия уступом 523">
             <a:extLst>
               <a:ext uri="{FF2B5EF4-FFF2-40B4-BE49-F238E27FC236}">
-                <a16:creationId xmlns:a16="http://schemas.microsoft.com/office/drawing/2014/main" xmlns="" id="{69F338FF-D8FA-4705-9387-D860ADD66E20}"/>
+                <a16:creationId xmlns:a16="http://schemas.microsoft.com/office/drawing/2014/main" id="{69F338FF-D8FA-4705-9387-D860ADD66E20}"/>
               </a:ext>
             </a:extLst>
           </p:cNvPr>
@@ -10873,7 +11666,7 @@
           <p:cNvPr id="54" name="Соединительная линия уступом 523">
             <a:extLst>
               <a:ext uri="{FF2B5EF4-FFF2-40B4-BE49-F238E27FC236}">
-                <a16:creationId xmlns:a16="http://schemas.microsoft.com/office/drawing/2014/main" xmlns="" id="{F8F4E366-172F-4FC2-BE12-AEED0FAE5B6E}"/>
+                <a16:creationId xmlns:a16="http://schemas.microsoft.com/office/drawing/2014/main" id="{F8F4E366-172F-4FC2-BE12-AEED0FAE5B6E}"/>
               </a:ext>
             </a:extLst>
           </p:cNvPr>
@@ -10918,7 +11711,7 @@
           <p:cNvPr id="55" name="Прямоугольник 54">
             <a:extLst>
               <a:ext uri="{FF2B5EF4-FFF2-40B4-BE49-F238E27FC236}">
-                <a16:creationId xmlns:a16="http://schemas.microsoft.com/office/drawing/2014/main" xmlns="" id="{D080EE49-8689-462D-BAED-5974EFA28A33}"/>
+                <a16:creationId xmlns:a16="http://schemas.microsoft.com/office/drawing/2014/main" id="{D080EE49-8689-462D-BAED-5974EFA28A33}"/>
               </a:ext>
             </a:extLst>
           </p:cNvPr>
@@ -10966,7 +11759,7 @@
           <p:cNvPr id="56" name="Прямая со стрелкой 55">
             <a:extLst>
               <a:ext uri="{FF2B5EF4-FFF2-40B4-BE49-F238E27FC236}">
-                <a16:creationId xmlns:a16="http://schemas.microsoft.com/office/drawing/2014/main" xmlns="" id="{8FA20AE9-5B1F-4302-BE76-1B9DEE6BED1E}"/>
+                <a16:creationId xmlns:a16="http://schemas.microsoft.com/office/drawing/2014/main" id="{8FA20AE9-5B1F-4302-BE76-1B9DEE6BED1E}"/>
               </a:ext>
             </a:extLst>
           </p:cNvPr>
@@ -11009,7 +11802,7 @@
           <p:cNvPr id="57" name="Прямая со стрелкой 56">
             <a:extLst>
               <a:ext uri="{FF2B5EF4-FFF2-40B4-BE49-F238E27FC236}">
-                <a16:creationId xmlns:a16="http://schemas.microsoft.com/office/drawing/2014/main" xmlns="" id="{598EEC52-FAAD-4C68-B6C4-904FD02558FE}"/>
+                <a16:creationId xmlns:a16="http://schemas.microsoft.com/office/drawing/2014/main" id="{598EEC52-FAAD-4C68-B6C4-904FD02558FE}"/>
               </a:ext>
             </a:extLst>
           </p:cNvPr>
@@ -11052,7 +11845,7 @@
           <p:cNvPr id="58" name="Соединительная линия уступом 523">
             <a:extLst>
               <a:ext uri="{FF2B5EF4-FFF2-40B4-BE49-F238E27FC236}">
-                <a16:creationId xmlns:a16="http://schemas.microsoft.com/office/drawing/2014/main" xmlns="" id="{6D52E519-D038-4281-A080-101A7FB243C8}"/>
+                <a16:creationId xmlns:a16="http://schemas.microsoft.com/office/drawing/2014/main" id="{6D52E519-D038-4281-A080-101A7FB243C8}"/>
               </a:ext>
             </a:extLst>
           </p:cNvPr>
@@ -11097,7 +11890,7 @@
           <p:cNvPr id="59" name="Соединительная линия уступом 523">
             <a:extLst>
               <a:ext uri="{FF2B5EF4-FFF2-40B4-BE49-F238E27FC236}">
-                <a16:creationId xmlns:a16="http://schemas.microsoft.com/office/drawing/2014/main" xmlns="" id="{E8C4D606-BFC2-4579-8ECA-38A266566981}"/>
+                <a16:creationId xmlns:a16="http://schemas.microsoft.com/office/drawing/2014/main" id="{E8C4D606-BFC2-4579-8ECA-38A266566981}"/>
               </a:ext>
             </a:extLst>
           </p:cNvPr>
@@ -11142,7 +11935,7 @@
           <p:cNvPr id="60" name="Прямая со стрелкой 59">
             <a:extLst>
               <a:ext uri="{FF2B5EF4-FFF2-40B4-BE49-F238E27FC236}">
-                <a16:creationId xmlns:a16="http://schemas.microsoft.com/office/drawing/2014/main" xmlns="" id="{E03D7C26-0A3B-4123-B72F-8456A408EDFB}"/>
+                <a16:creationId xmlns:a16="http://schemas.microsoft.com/office/drawing/2014/main" id="{E03D7C26-0A3B-4123-B72F-8456A408EDFB}"/>
               </a:ext>
             </a:extLst>
           </p:cNvPr>
@@ -11185,7 +11978,7 @@
           <p:cNvPr id="61" name="Прямая со стрелкой 60">
             <a:extLst>
               <a:ext uri="{FF2B5EF4-FFF2-40B4-BE49-F238E27FC236}">
-                <a16:creationId xmlns:a16="http://schemas.microsoft.com/office/drawing/2014/main" xmlns="" id="{740ED13F-5617-44FB-AB16-EFD3E35B5466}"/>
+                <a16:creationId xmlns:a16="http://schemas.microsoft.com/office/drawing/2014/main" id="{740ED13F-5617-44FB-AB16-EFD3E35B5466}"/>
               </a:ext>
             </a:extLst>
           </p:cNvPr>
@@ -11228,7 +12021,7 @@
           <p:cNvPr id="62" name="Прямая со стрелкой 61">
             <a:extLst>
               <a:ext uri="{FF2B5EF4-FFF2-40B4-BE49-F238E27FC236}">
-                <a16:creationId xmlns:a16="http://schemas.microsoft.com/office/drawing/2014/main" xmlns="" id="{71961C47-19A9-4AF4-BA51-2E5E53AA0C1E}"/>
+                <a16:creationId xmlns:a16="http://schemas.microsoft.com/office/drawing/2014/main" id="{71961C47-19A9-4AF4-BA51-2E5E53AA0C1E}"/>
               </a:ext>
             </a:extLst>
           </p:cNvPr>
@@ -11271,7 +12064,7 @@
           <p:cNvPr id="63" name="Прямая со стрелкой 62">
             <a:extLst>
               <a:ext uri="{FF2B5EF4-FFF2-40B4-BE49-F238E27FC236}">
-                <a16:creationId xmlns:a16="http://schemas.microsoft.com/office/drawing/2014/main" xmlns="" id="{2DA0694A-EB41-4CE2-AA9E-B52FEE40DE0C}"/>
+                <a16:creationId xmlns:a16="http://schemas.microsoft.com/office/drawing/2014/main" id="{2DA0694A-EB41-4CE2-AA9E-B52FEE40DE0C}"/>
               </a:ext>
             </a:extLst>
           </p:cNvPr>
@@ -11314,7 +12107,7 @@
           <p:cNvPr id="64" name="Соединительная линия уступом 523">
             <a:extLst>
               <a:ext uri="{FF2B5EF4-FFF2-40B4-BE49-F238E27FC236}">
-                <a16:creationId xmlns:a16="http://schemas.microsoft.com/office/drawing/2014/main" xmlns="" id="{601DFF7D-F1EA-427A-9EC1-1385D719621D}"/>
+                <a16:creationId xmlns:a16="http://schemas.microsoft.com/office/drawing/2014/main" id="{601DFF7D-F1EA-427A-9EC1-1385D719621D}"/>
               </a:ext>
             </a:extLst>
           </p:cNvPr>
@@ -11359,7 +12152,7 @@
           <p:cNvPr id="65" name="Соединительная линия уступом 523">
             <a:extLst>
               <a:ext uri="{FF2B5EF4-FFF2-40B4-BE49-F238E27FC236}">
-                <a16:creationId xmlns:a16="http://schemas.microsoft.com/office/drawing/2014/main" xmlns="" id="{651B23A2-86E9-4468-A171-0DBCEA5D42E8}"/>
+                <a16:creationId xmlns:a16="http://schemas.microsoft.com/office/drawing/2014/main" id="{651B23A2-86E9-4468-A171-0DBCEA5D42E8}"/>
               </a:ext>
             </a:extLst>
           </p:cNvPr>
@@ -11404,7 +12197,7 @@
           <p:cNvPr id="66" name="Соединительная линия уступом 523">
             <a:extLst>
               <a:ext uri="{FF2B5EF4-FFF2-40B4-BE49-F238E27FC236}">
-                <a16:creationId xmlns:a16="http://schemas.microsoft.com/office/drawing/2014/main" xmlns="" id="{6AC3527A-8784-4D6E-9EB8-0C6A3FB498F5}"/>
+                <a16:creationId xmlns:a16="http://schemas.microsoft.com/office/drawing/2014/main" id="{6AC3527A-8784-4D6E-9EB8-0C6A3FB498F5}"/>
               </a:ext>
             </a:extLst>
           </p:cNvPr>
@@ -11449,7 +12242,7 @@
           <p:cNvPr id="67" name="Соединительная линия уступом 523">
             <a:extLst>
               <a:ext uri="{FF2B5EF4-FFF2-40B4-BE49-F238E27FC236}">
-                <a16:creationId xmlns:a16="http://schemas.microsoft.com/office/drawing/2014/main" xmlns="" id="{1E229524-E407-4977-93F3-A7442BE0F848}"/>
+                <a16:creationId xmlns:a16="http://schemas.microsoft.com/office/drawing/2014/main" id="{1E229524-E407-4977-93F3-A7442BE0F848}"/>
               </a:ext>
             </a:extLst>
           </p:cNvPr>
@@ -11494,7 +12287,7 @@
           <p:cNvPr id="68" name="Соединительная линия уступом 523">
             <a:extLst>
               <a:ext uri="{FF2B5EF4-FFF2-40B4-BE49-F238E27FC236}">
-                <a16:creationId xmlns:a16="http://schemas.microsoft.com/office/drawing/2014/main" xmlns="" id="{02643FCE-10F1-4393-8A90-521548C1C33B}"/>
+                <a16:creationId xmlns:a16="http://schemas.microsoft.com/office/drawing/2014/main" id="{02643FCE-10F1-4393-8A90-521548C1C33B}"/>
               </a:ext>
             </a:extLst>
           </p:cNvPr>
@@ -11539,7 +12332,7 @@
           <p:cNvPr id="69" name="Соединительная линия уступом 523">
             <a:extLst>
               <a:ext uri="{FF2B5EF4-FFF2-40B4-BE49-F238E27FC236}">
-                <a16:creationId xmlns:a16="http://schemas.microsoft.com/office/drawing/2014/main" xmlns="" id="{CCB906EC-15F8-49B2-A37A-809E9B64809E}"/>
+                <a16:creationId xmlns:a16="http://schemas.microsoft.com/office/drawing/2014/main" id="{CCB906EC-15F8-49B2-A37A-809E9B64809E}"/>
               </a:ext>
             </a:extLst>
           </p:cNvPr>
@@ -11584,7 +12377,7 @@
           <p:cNvPr id="70" name="Соединительная линия уступом 523">
             <a:extLst>
               <a:ext uri="{FF2B5EF4-FFF2-40B4-BE49-F238E27FC236}">
-                <a16:creationId xmlns:a16="http://schemas.microsoft.com/office/drawing/2014/main" xmlns="" id="{7875949F-463A-435C-93B4-1638CBA0C53D}"/>
+                <a16:creationId xmlns:a16="http://schemas.microsoft.com/office/drawing/2014/main" id="{7875949F-463A-435C-93B4-1638CBA0C53D}"/>
               </a:ext>
             </a:extLst>
           </p:cNvPr>
@@ -11629,7 +12422,7 @@
           <p:cNvPr id="71" name="Прямая со стрелкой 70">
             <a:extLst>
               <a:ext uri="{FF2B5EF4-FFF2-40B4-BE49-F238E27FC236}">
-                <a16:creationId xmlns:a16="http://schemas.microsoft.com/office/drawing/2014/main" xmlns="" id="{6A34E9ED-30A2-40B5-AA90-C4AA6758A1F1}"/>
+                <a16:creationId xmlns:a16="http://schemas.microsoft.com/office/drawing/2014/main" id="{6A34E9ED-30A2-40B5-AA90-C4AA6758A1F1}"/>
               </a:ext>
             </a:extLst>
           </p:cNvPr>
@@ -11672,7 +12465,7 @@
           <p:cNvPr id="72" name="Соединительная линия уступом 523">
             <a:extLst>
               <a:ext uri="{FF2B5EF4-FFF2-40B4-BE49-F238E27FC236}">
-                <a16:creationId xmlns:a16="http://schemas.microsoft.com/office/drawing/2014/main" xmlns="" id="{C356EB2D-01FA-4848-80C1-C47FAA58665E}"/>
+                <a16:creationId xmlns:a16="http://schemas.microsoft.com/office/drawing/2014/main" id="{C356EB2D-01FA-4848-80C1-C47FAA58665E}"/>
               </a:ext>
             </a:extLst>
           </p:cNvPr>
@@ -11717,7 +12510,7 @@
           <p:cNvPr id="73" name="Соединительная линия уступом 523">
             <a:extLst>
               <a:ext uri="{FF2B5EF4-FFF2-40B4-BE49-F238E27FC236}">
-                <a16:creationId xmlns:a16="http://schemas.microsoft.com/office/drawing/2014/main" xmlns="" id="{B54539AD-0F6E-4E60-B45A-9DCBE7451733}"/>
+                <a16:creationId xmlns:a16="http://schemas.microsoft.com/office/drawing/2014/main" id="{B54539AD-0F6E-4E60-B45A-9DCBE7451733}"/>
               </a:ext>
             </a:extLst>
           </p:cNvPr>
@@ -11762,7 +12555,7 @@
           <p:cNvPr id="74" name="Прямая со стрелкой 73">
             <a:extLst>
               <a:ext uri="{FF2B5EF4-FFF2-40B4-BE49-F238E27FC236}">
-                <a16:creationId xmlns:a16="http://schemas.microsoft.com/office/drawing/2014/main" xmlns="" id="{2EA9E2A7-A043-487B-BD5C-D3DD912B4356}"/>
+                <a16:creationId xmlns:a16="http://schemas.microsoft.com/office/drawing/2014/main" id="{2EA9E2A7-A043-487B-BD5C-D3DD912B4356}"/>
               </a:ext>
             </a:extLst>
           </p:cNvPr>
@@ -11805,7 +12598,7 @@
           <p:cNvPr id="75" name="Прямая со стрелкой 74">
             <a:extLst>
               <a:ext uri="{FF2B5EF4-FFF2-40B4-BE49-F238E27FC236}">
-                <a16:creationId xmlns:a16="http://schemas.microsoft.com/office/drawing/2014/main" xmlns="" id="{2508D6D7-6D54-4C03-B717-A7AEB9F4714C}"/>
+                <a16:creationId xmlns:a16="http://schemas.microsoft.com/office/drawing/2014/main" id="{2508D6D7-6D54-4C03-B717-A7AEB9F4714C}"/>
               </a:ext>
             </a:extLst>
           </p:cNvPr>
@@ -11848,7 +12641,7 @@
           <p:cNvPr id="76" name="Прямая со стрелкой 75">
             <a:extLst>
               <a:ext uri="{FF2B5EF4-FFF2-40B4-BE49-F238E27FC236}">
-                <a16:creationId xmlns:a16="http://schemas.microsoft.com/office/drawing/2014/main" xmlns="" id="{0862DCEC-2AFC-4705-833D-2F85536D579C}"/>
+                <a16:creationId xmlns:a16="http://schemas.microsoft.com/office/drawing/2014/main" id="{0862DCEC-2AFC-4705-833D-2F85536D579C}"/>
               </a:ext>
             </a:extLst>
           </p:cNvPr>
@@ -11891,7 +12684,7 @@
           <p:cNvPr id="77" name="Прямая со стрелкой 76">
             <a:extLst>
               <a:ext uri="{FF2B5EF4-FFF2-40B4-BE49-F238E27FC236}">
-                <a16:creationId xmlns:a16="http://schemas.microsoft.com/office/drawing/2014/main" xmlns="" id="{F77D2DA5-EDEF-4E45-8230-51F2A41A8199}"/>
+                <a16:creationId xmlns:a16="http://schemas.microsoft.com/office/drawing/2014/main" id="{F77D2DA5-EDEF-4E45-8230-51F2A41A8199}"/>
               </a:ext>
             </a:extLst>
           </p:cNvPr>
@@ -11934,7 +12727,7 @@
           <p:cNvPr id="78" name="Соединительная линия уступом 523">
             <a:extLst>
               <a:ext uri="{FF2B5EF4-FFF2-40B4-BE49-F238E27FC236}">
-                <a16:creationId xmlns:a16="http://schemas.microsoft.com/office/drawing/2014/main" xmlns="" id="{5EDBD8FF-3888-4099-82F9-0F2356A22121}"/>
+                <a16:creationId xmlns:a16="http://schemas.microsoft.com/office/drawing/2014/main" id="{5EDBD8FF-3888-4099-82F9-0F2356A22121}"/>
               </a:ext>
             </a:extLst>
           </p:cNvPr>
@@ -11979,7 +12772,7 @@
           <p:cNvPr id="79" name="Соединительная линия уступом 523">
             <a:extLst>
               <a:ext uri="{FF2B5EF4-FFF2-40B4-BE49-F238E27FC236}">
-                <a16:creationId xmlns:a16="http://schemas.microsoft.com/office/drawing/2014/main" xmlns="" id="{491AB98D-9B64-49BC-930A-7D12B9554A07}"/>
+                <a16:creationId xmlns:a16="http://schemas.microsoft.com/office/drawing/2014/main" id="{491AB98D-9B64-49BC-930A-7D12B9554A07}"/>
               </a:ext>
             </a:extLst>
           </p:cNvPr>
@@ -12024,7 +12817,7 @@
           <p:cNvPr id="80" name="Соединительная линия уступом 523">
             <a:extLst>
               <a:ext uri="{FF2B5EF4-FFF2-40B4-BE49-F238E27FC236}">
-                <a16:creationId xmlns:a16="http://schemas.microsoft.com/office/drawing/2014/main" xmlns="" id="{2B4830C7-F7F8-4FBB-B4A6-47E46EA7B2F8}"/>
+                <a16:creationId xmlns:a16="http://schemas.microsoft.com/office/drawing/2014/main" id="{2B4830C7-F7F8-4FBB-B4A6-47E46EA7B2F8}"/>
               </a:ext>
             </a:extLst>
           </p:cNvPr>
@@ -12069,7 +12862,7 @@
           <p:cNvPr id="81" name="Соединительная линия уступом 523">
             <a:extLst>
               <a:ext uri="{FF2B5EF4-FFF2-40B4-BE49-F238E27FC236}">
-                <a16:creationId xmlns:a16="http://schemas.microsoft.com/office/drawing/2014/main" xmlns="" id="{25968507-4E3A-4825-A0E5-BF572F1C5CA1}"/>
+                <a16:creationId xmlns:a16="http://schemas.microsoft.com/office/drawing/2014/main" id="{25968507-4E3A-4825-A0E5-BF572F1C5CA1}"/>
               </a:ext>
             </a:extLst>
           </p:cNvPr>
@@ -12114,7 +12907,7 @@
           <p:cNvPr id="82" name="Прямая со стрелкой 81">
             <a:extLst>
               <a:ext uri="{FF2B5EF4-FFF2-40B4-BE49-F238E27FC236}">
-                <a16:creationId xmlns:a16="http://schemas.microsoft.com/office/drawing/2014/main" xmlns="" id="{FEF0748A-B663-49A8-9415-C42D5F6298E4}"/>
+                <a16:creationId xmlns:a16="http://schemas.microsoft.com/office/drawing/2014/main" id="{FEF0748A-B663-49A8-9415-C42D5F6298E4}"/>
               </a:ext>
             </a:extLst>
           </p:cNvPr>
@@ -12157,7 +12950,7 @@
           <p:cNvPr id="83" name="Прямая со стрелкой 82">
             <a:extLst>
               <a:ext uri="{FF2B5EF4-FFF2-40B4-BE49-F238E27FC236}">
-                <a16:creationId xmlns:a16="http://schemas.microsoft.com/office/drawing/2014/main" xmlns="" id="{1773E2C9-86CF-4909-BE24-C4E533596803}"/>
+                <a16:creationId xmlns:a16="http://schemas.microsoft.com/office/drawing/2014/main" id="{1773E2C9-86CF-4909-BE24-C4E533596803}"/>
               </a:ext>
             </a:extLst>
           </p:cNvPr>
@@ -12200,7 +12993,7 @@
           <p:cNvPr id="84" name="Соединительная линия уступом 523">
             <a:extLst>
               <a:ext uri="{FF2B5EF4-FFF2-40B4-BE49-F238E27FC236}">
-                <a16:creationId xmlns:a16="http://schemas.microsoft.com/office/drawing/2014/main" xmlns="" id="{93FABB1C-3159-4BB7-8C74-41BC65AA4528}"/>
+                <a16:creationId xmlns:a16="http://schemas.microsoft.com/office/drawing/2014/main" id="{93FABB1C-3159-4BB7-8C74-41BC65AA4528}"/>
               </a:ext>
             </a:extLst>
           </p:cNvPr>
@@ -12245,7 +13038,7 @@
           <p:cNvPr id="85" name="Соединительная линия уступом 523">
             <a:extLst>
               <a:ext uri="{FF2B5EF4-FFF2-40B4-BE49-F238E27FC236}">
-                <a16:creationId xmlns:a16="http://schemas.microsoft.com/office/drawing/2014/main" xmlns="" id="{813E6CB1-3FED-48AC-A38F-C3E6B8A7343B}"/>
+                <a16:creationId xmlns:a16="http://schemas.microsoft.com/office/drawing/2014/main" id="{813E6CB1-3FED-48AC-A38F-C3E6B8A7343B}"/>
               </a:ext>
             </a:extLst>
           </p:cNvPr>
@@ -12290,7 +13083,7 @@
           <p:cNvPr id="86" name="Прямоугольник 85">
             <a:extLst>
               <a:ext uri="{FF2B5EF4-FFF2-40B4-BE49-F238E27FC236}">
-                <a16:creationId xmlns:a16="http://schemas.microsoft.com/office/drawing/2014/main" xmlns="" id="{104BB11C-19DA-4DA4-8899-2145048FEA67}"/>
+                <a16:creationId xmlns:a16="http://schemas.microsoft.com/office/drawing/2014/main" id="{104BB11C-19DA-4DA4-8899-2145048FEA67}"/>
               </a:ext>
             </a:extLst>
           </p:cNvPr>
@@ -12338,7 +13131,7 @@
           <p:cNvPr id="87" name="Прямоугольник 86">
             <a:extLst>
               <a:ext uri="{FF2B5EF4-FFF2-40B4-BE49-F238E27FC236}">
-                <a16:creationId xmlns:a16="http://schemas.microsoft.com/office/drawing/2014/main" xmlns="" id="{015BC524-92C7-4AD3-AAE2-C2638148AEC6}"/>
+                <a16:creationId xmlns:a16="http://schemas.microsoft.com/office/drawing/2014/main" id="{015BC524-92C7-4AD3-AAE2-C2638148AEC6}"/>
               </a:ext>
             </a:extLst>
           </p:cNvPr>
@@ -12386,7 +13179,7 @@
           <p:cNvPr id="88" name="Прямая соединительная линия 87">
             <a:extLst>
               <a:ext uri="{FF2B5EF4-FFF2-40B4-BE49-F238E27FC236}">
-                <a16:creationId xmlns:a16="http://schemas.microsoft.com/office/drawing/2014/main" xmlns="" id="{30601EE9-46E6-4732-A0DE-B57457679897}"/>
+                <a16:creationId xmlns:a16="http://schemas.microsoft.com/office/drawing/2014/main" id="{30601EE9-46E6-4732-A0DE-B57457679897}"/>
               </a:ext>
             </a:extLst>
           </p:cNvPr>
@@ -12431,7 +13224,7 @@
           <p:cNvPr id="89" name="Прямая со стрелкой 88">
             <a:extLst>
               <a:ext uri="{FF2B5EF4-FFF2-40B4-BE49-F238E27FC236}">
-                <a16:creationId xmlns:a16="http://schemas.microsoft.com/office/drawing/2014/main" xmlns="" id="{CBC4A588-3776-409A-BA21-84D57C3B0391}"/>
+                <a16:creationId xmlns:a16="http://schemas.microsoft.com/office/drawing/2014/main" id="{CBC4A588-3776-409A-BA21-84D57C3B0391}"/>
               </a:ext>
             </a:extLst>
           </p:cNvPr>
@@ -12474,7 +13267,7 @@
           <p:cNvPr id="90" name="Прямая со стрелкой 89">
             <a:extLst>
               <a:ext uri="{FF2B5EF4-FFF2-40B4-BE49-F238E27FC236}">
-                <a16:creationId xmlns:a16="http://schemas.microsoft.com/office/drawing/2014/main" xmlns="" id="{40FCCF04-27A6-4B4C-8065-3A1DFBFA8F5B}"/>
+                <a16:creationId xmlns:a16="http://schemas.microsoft.com/office/drawing/2014/main" id="{40FCCF04-27A6-4B4C-8065-3A1DFBFA8F5B}"/>
               </a:ext>
             </a:extLst>
           </p:cNvPr>
@@ -12517,7 +13310,7 @@
           <p:cNvPr id="91" name="Прямоугольник 90">
             <a:extLst>
               <a:ext uri="{FF2B5EF4-FFF2-40B4-BE49-F238E27FC236}">
-                <a16:creationId xmlns:a16="http://schemas.microsoft.com/office/drawing/2014/main" xmlns="" id="{2E7BAEEE-3678-43D6-B838-7DDAAC7A27FA}"/>
+                <a16:creationId xmlns:a16="http://schemas.microsoft.com/office/drawing/2014/main" id="{2E7BAEEE-3678-43D6-B838-7DDAAC7A27FA}"/>
               </a:ext>
             </a:extLst>
           </p:cNvPr>
@@ -12586,7 +13379,7 @@
           <p:cNvPr id="92" name="Соединительная линия уступом 523">
             <a:extLst>
               <a:ext uri="{FF2B5EF4-FFF2-40B4-BE49-F238E27FC236}">
-                <a16:creationId xmlns:a16="http://schemas.microsoft.com/office/drawing/2014/main" xmlns="" id="{6A288F7E-6546-4FC6-BEDC-8C5ECA54E8E4}"/>
+                <a16:creationId xmlns:a16="http://schemas.microsoft.com/office/drawing/2014/main" id="{6A288F7E-6546-4FC6-BEDC-8C5ECA54E8E4}"/>
               </a:ext>
             </a:extLst>
           </p:cNvPr>
@@ -12894,7 +13687,7 @@
   <a:extraClrSchemeLst/>
   <a:extLst>
     <a:ext uri="{05A4C25C-085E-4340-85A3-A5531E510DB2}">
-      <thm15:themeFamily xmlns:thm15="http://schemas.microsoft.com/office/thememl/2012/main" xmlns="" name="Office Theme" id="{62F939B6-93AF-4DB8-9C6B-D6C7DFDC589F}" vid="{4A3C46E8-61CC-4603-A589-7422A47A8E4A}"/>
+      <thm15:themeFamily xmlns:thm15="http://schemas.microsoft.com/office/thememl/2012/main" name="Office Theme" id="{62F939B6-93AF-4DB8-9C6B-D6C7DFDC589F}" vid="{4A3C46E8-61CC-4603-A589-7422A47A8E4A}"/>
     </a:ext>
   </a:extLst>
 </a:theme>
@@ -13155,7 +13948,7 @@
   <a:extraClrSchemeLst/>
   <a:extLst>
     <a:ext uri="{05A4C25C-085E-4340-85A3-A5531E510DB2}">
-      <thm15:themeFamily xmlns:thm15="http://schemas.microsoft.com/office/thememl/2012/main" xmlns="" name="Office Theme" id="{62F939B6-93AF-4DB8-9C6B-D6C7DFDC589F}" vid="{4A3C46E8-61CC-4603-A589-7422A47A8E4A}"/>
+      <thm15:themeFamily xmlns:thm15="http://schemas.microsoft.com/office/thememl/2012/main" name="Office Theme" id="{62F939B6-93AF-4DB8-9C6B-D6C7DFDC589F}" vid="{4A3C46E8-61CC-4603-A589-7422A47A8E4A}"/>
     </a:ext>
   </a:extLst>
 </a:theme>
